--- a/exports/pptx/lessons/senior-module-13-indic-ecology/day-02-five-elements-as-frame.pptx
+++ b/exports/pptx/lessons/senior-module-13-indic-ecology/day-02-five-elements-as-frame.pptx
@@ -3626,7 +3626,7 @@
         <p:spPr>
           <a:xfrm>
             <a:off x="634901" y="883593"/>
-            <a:ext cx="8102798" cy="1462683"/>
+            <a:ext cx="8102798" cy="281880"/>
           </a:xfrm>
           <a:prstGeom prst="rect">
             <a:avLst/>
@@ -3657,7 +3657,7 @@
                 <a:ea typeface="Georgia" pitchFamily="34" charset="-122"/>
                 <a:cs typeface="Georgia" pitchFamily="34" charset="-120"/>
               </a:rPr>
-              <a:t>State the observable phenomenon first.</a:t>
+              <a:t>Recall Module 2's pañcabhūta.</a:t>
             </a:r>
             <a:pPr algn="l" indent="0" marL="0">
               <a:lnSpc>
@@ -3677,10 +3677,32 @@
                 <a:ea typeface="Georgia" pitchFamily="34" charset="-122"/>
                 <a:cs typeface="Georgia" pitchFamily="34" charset="-120"/>
               </a:rPr>
-              <a:t> Whatever the day's idea is — a number trick, a celestial pattern, a herb's identifying feature — start with the thing students can see, hear, or do.</a:t>
+              <a:t> Earth, water, fire, air, space — the five elements seen as both physical and pervasive.</a:t>
             </a:r>
             <a:endParaRPr lang="en-US" sz="1200" dirty="0"/>
           </a:p>
+        </p:txBody>
+      </p:sp>
+      <p:sp>
+        <p:nvSpPr>
+          <p:cNvPr id="5" name="Text 3"/>
+          <p:cNvSpPr/>
+          <p:nvPr/>
+        </p:nvSpPr>
+        <p:spPr>
+          <a:xfrm>
+            <a:off x="634901" y="1266974"/>
+            <a:ext cx="8102798" cy="693241"/>
+          </a:xfrm>
+          <a:prstGeom prst="rect">
+            <a:avLst/>
+          </a:prstGeom>
+          <a:noFill/>
+          <a:ln/>
+        </p:spPr>
+        <p:txBody>
+          <a:bodyPr wrap="square" lIns="0" tIns="0" rIns="0" bIns="0" rtlCol="0" anchor="t"/>
+          <a:lstStyle/>
           <a:p>
             <a:pPr algn="l" marL="342900" indent="-342900">
               <a:lnSpc>
@@ -3701,7 +3723,7 @@
                 <a:ea typeface="Georgia" pitchFamily="34" charset="-122"/>
                 <a:cs typeface="Georgia" pitchFamily="34" charset="-120"/>
               </a:rPr>
-              <a:t>Introduce the Sanskrit term.</a:t>
+              <a:t>The interconnection principle.</a:t>
             </a:r>
             <a:pPr algn="l" indent="0" marL="0">
               <a:lnSpc>
@@ -3721,10 +3743,32 @@
                 <a:ea typeface="Georgia" pitchFamily="34" charset="-122"/>
                 <a:cs typeface="Georgia" pitchFamily="34" charset="-120"/>
               </a:rPr>
-              <a:t> Once, in the triple format, then italicised only.</a:t>
+              <a:t> No element exists alone. Earth needs water to support life. Water needs space to flow. Air needs warmth (fire) to circulate. Space contains all. This is the COSMOLOGICAL grounding for ecological ethics.</a:t>
             </a:r>
             <a:endParaRPr lang="en-US" sz="1200" dirty="0"/>
           </a:p>
+        </p:txBody>
+      </p:sp>
+      <p:sp>
+        <p:nvSpPr>
+          <p:cNvPr id="6" name="Text 4"/>
+          <p:cNvSpPr/>
+          <p:nvPr/>
+        </p:nvSpPr>
+        <p:spPr>
+          <a:xfrm>
+            <a:off x="634901" y="2061716"/>
+            <a:ext cx="8102798" cy="693241"/>
+          </a:xfrm>
+          <a:prstGeom prst="rect">
+            <a:avLst/>
+          </a:prstGeom>
+          <a:noFill/>
+          <a:ln/>
+        </p:spPr>
+        <p:txBody>
+          <a:bodyPr wrap="square" lIns="0" tIns="0" rIns="0" bIns="0" rtlCol="0" anchor="t"/>
+          <a:lstStyle/>
           <a:p>
             <a:pPr algn="l" marL="342900" indent="-342900">
               <a:lnSpc>
@@ -3745,7 +3789,7 @@
                 <a:ea typeface="Georgia" pitchFamily="34" charset="-122"/>
                 <a:cs typeface="Georgia" pitchFamily="34" charset="-120"/>
               </a:rPr>
-              <a:t>Build the conceptual map.</a:t>
+              <a:t>Modern translation.</a:t>
             </a:r>
             <a:pPr algn="l" indent="0" marL="0">
               <a:lnSpc>
@@ -3765,10 +3809,32 @@
                 <a:ea typeface="Georgia" pitchFamily="34" charset="-122"/>
                 <a:cs typeface="Georgia" pitchFamily="34" charset="-120"/>
               </a:rPr>
-              <a:t> Connect today's idea to prior modules (especially Module 2 if applicable) and prior days.</a:t>
+              <a:t> Ecosystems = elemental cycles (carbon, nitrogen, water cycles). The pañcabhūta framework essentially names: matter (earth), water cycle (ap), energy (tejas), atmosphere (vāyu), and the systemic interconnection (ākāśa).</a:t>
             </a:r>
             <a:endParaRPr lang="en-US" sz="1200" dirty="0"/>
           </a:p>
+        </p:txBody>
+      </p:sp>
+      <p:sp>
+        <p:nvSpPr>
+          <p:cNvPr id="7" name="Text 5"/>
+          <p:cNvSpPr/>
+          <p:nvPr/>
+        </p:nvSpPr>
+        <p:spPr>
+          <a:xfrm>
+            <a:off x="634901" y="2856458"/>
+            <a:ext cx="8102798" cy="487561"/>
+          </a:xfrm>
+          <a:prstGeom prst="rect">
+            <a:avLst/>
+          </a:prstGeom>
+          <a:noFill/>
+          <a:ln/>
+        </p:spPr>
+        <p:txBody>
+          <a:bodyPr wrap="square" lIns="0" tIns="0" rIns="0" bIns="0" rtlCol="0" anchor="t"/>
+          <a:lstStyle/>
           <a:p>
             <a:pPr algn="l" marL="342900" indent="-342900">
               <a:lnSpc>
@@ -3789,7 +3855,7 @@
                 <a:ea typeface="Georgia" pitchFamily="34" charset="-122"/>
                 <a:cs typeface="Georgia" pitchFamily="34" charset="-120"/>
               </a:rPr>
-              <a:t>Work an example</a:t>
+              <a:t>Source.</a:t>
             </a:r>
             <a:pPr algn="l" indent="0" marL="0">
               <a:lnSpc>
@@ -3809,10 +3875,112 @@
                 <a:ea typeface="Georgia" pitchFamily="34" charset="-122"/>
                 <a:cs typeface="Georgia" pitchFamily="34" charset="-120"/>
               </a:rPr>
-              <a:t> with the whole class on the board.</a:t>
+              <a:t> Bhagavad Gītā 13.5 lists </a:t>
+            </a:r>
+            <a:pPr algn="l" indent="0" marL="0">
+              <a:lnSpc>
+                <a:spcPts val="1620"/>
+              </a:lnSpc>
+              <a:spcAft>
+                <a:spcPts val="300"/>
+              </a:spcAft>
+              <a:buNone/>
+            </a:pPr>
+            <a:r>
+              <a:rPr lang="en-US" sz="1200" i="1" dirty="0">
+                <a:solidFill>
+                  <a:srgbClr val="1A1A1A"/>
+                </a:solidFill>
+                <a:latin typeface="Georgia" pitchFamily="34" charset="0"/>
+                <a:ea typeface="Georgia" pitchFamily="34" charset="-122"/>
+                <a:cs typeface="Georgia" pitchFamily="34" charset="-120"/>
+              </a:rPr>
+              <a:t>mahā-bhūtāni</a:t>
+            </a:r>
+            <a:pPr algn="l" indent="0" marL="0">
+              <a:lnSpc>
+                <a:spcPts val="1620"/>
+              </a:lnSpc>
+              <a:spcAft>
+                <a:spcPts val="300"/>
+              </a:spcAft>
+              <a:buNone/>
+            </a:pPr>
+            <a:r>
+              <a:rPr lang="en-US" sz="1200" dirty="0">
+                <a:solidFill>
+                  <a:srgbClr val="1A1A1A"/>
+                </a:solidFill>
+                <a:latin typeface="Georgia" pitchFamily="34" charset="0"/>
+                <a:ea typeface="Georgia" pitchFamily="34" charset="-122"/>
+                <a:cs typeface="Georgia" pitchFamily="34" charset="-120"/>
+              </a:rPr>
+              <a:t> — the gross elements — as one of the </a:t>
+            </a:r>
+            <a:pPr algn="l" indent="0" marL="0">
+              <a:lnSpc>
+                <a:spcPts val="1620"/>
+              </a:lnSpc>
+              <a:spcAft>
+                <a:spcPts val="300"/>
+              </a:spcAft>
+              <a:buNone/>
+            </a:pPr>
+            <a:r>
+              <a:rPr lang="en-US" sz="1200" i="1" dirty="0">
+                <a:solidFill>
+                  <a:srgbClr val="1A1A1A"/>
+                </a:solidFill>
+                <a:latin typeface="Georgia" pitchFamily="34" charset="0"/>
+                <a:ea typeface="Georgia" pitchFamily="34" charset="-122"/>
+                <a:cs typeface="Georgia" pitchFamily="34" charset="-120"/>
+              </a:rPr>
+              <a:t>kṣetra</a:t>
+            </a:r>
+            <a:pPr algn="l" indent="0" marL="0">
+              <a:lnSpc>
+                <a:spcPts val="1620"/>
+              </a:lnSpc>
+              <a:spcAft>
+                <a:spcPts val="300"/>
+              </a:spcAft>
+              <a:buNone/>
+            </a:pPr>
+            <a:r>
+              <a:rPr lang="en-US" sz="1200" dirty="0">
+                <a:solidFill>
+                  <a:srgbClr val="1A1A1A"/>
+                </a:solidFill>
+                <a:latin typeface="Georgia" pitchFamily="34" charset="0"/>
+                <a:ea typeface="Georgia" pitchFamily="34" charset="-122"/>
+                <a:cs typeface="Georgia" pitchFamily="34" charset="-120"/>
+              </a:rPr>
+              <a:t> (field) categories. The conceptual frame is in place by ~2nd century BCE.</a:t>
             </a:r>
             <a:endParaRPr lang="en-US" sz="1200" dirty="0"/>
           </a:p>
+        </p:txBody>
+      </p:sp>
+      <p:sp>
+        <p:nvSpPr>
+          <p:cNvPr id="8" name="Text 6"/>
+          <p:cNvSpPr/>
+          <p:nvPr/>
+        </p:nvSpPr>
+        <p:spPr>
+          <a:xfrm>
+            <a:off x="634901" y="3445520"/>
+            <a:ext cx="8102798" cy="487561"/>
+          </a:xfrm>
+          <a:prstGeom prst="rect">
+            <a:avLst/>
+          </a:prstGeom>
+          <a:noFill/>
+          <a:ln/>
+        </p:spPr>
+        <p:txBody>
+          <a:bodyPr wrap="square" lIns="0" tIns="0" rIns="0" bIns="0" rtlCol="0" anchor="t"/>
+          <a:lstStyle/>
           <a:p>
             <a:pPr algn="l" marL="342900" indent="-342900">
               <a:lnSpc>
@@ -3833,7 +4001,7 @@
                 <a:ea typeface="Georgia" pitchFamily="34" charset="-122"/>
                 <a:cs typeface="Georgia" pitchFamily="34" charset="-120"/>
               </a:rPr>
-              <a:t>Independent or paired practice</a:t>
+              <a:t>Discussion.</a:t>
             </a:r>
             <a:pPr algn="l" indent="0" marL="0">
               <a:lnSpc>
@@ -3853,7 +4021,67 @@
                 <a:ea typeface="Georgia" pitchFamily="34" charset="-122"/>
                 <a:cs typeface="Georgia" pitchFamily="34" charset="-120"/>
               </a:rPr>
-              <a:t> for ~5 minutes.</a:t>
+              <a:t> </a:t>
+            </a:r>
+            <a:pPr algn="l" indent="0" marL="0">
+              <a:lnSpc>
+                <a:spcPts val="1620"/>
+              </a:lnSpc>
+              <a:spcAft>
+                <a:spcPts val="300"/>
+              </a:spcAft>
+              <a:buNone/>
+            </a:pPr>
+            <a:r>
+              <a:rPr lang="en-US" sz="1200" i="1" dirty="0">
+                <a:solidFill>
+                  <a:srgbClr val="1A1A1A"/>
+                </a:solidFill>
+                <a:latin typeface="Georgia" pitchFamily="34" charset="0"/>
+                <a:ea typeface="Georgia" pitchFamily="34" charset="-122"/>
+                <a:cs typeface="Georgia" pitchFamily="34" charset="-120"/>
+              </a:rPr>
+              <a:t>"If we damage one element — pollute air, contaminate water, deforest land — what happens to the others?"</a:t>
+            </a:r>
+            <a:pPr algn="l" indent="0" marL="0">
+              <a:lnSpc>
+                <a:spcPts val="1620"/>
+              </a:lnSpc>
+              <a:spcAft>
+                <a:spcPts val="300"/>
+              </a:spcAft>
+              <a:buNone/>
+            </a:pPr>
+            <a:r>
+              <a:rPr lang="en-US" sz="1200" dirty="0">
+                <a:solidFill>
+                  <a:srgbClr val="1A1A1A"/>
+                </a:solidFill>
+                <a:latin typeface="Georgia" pitchFamily="34" charset="0"/>
+                <a:ea typeface="Georgia" pitchFamily="34" charset="-122"/>
+                <a:cs typeface="Georgia" pitchFamily="34" charset="-120"/>
+              </a:rPr>
+              <a:t> Modern climate science answers concretely. </a:t>
+            </a:r>
+            <a:pPr algn="l" indent="0" marL="0">
+              <a:lnSpc>
+                <a:spcPts val="1620"/>
+              </a:lnSpc>
+              <a:spcAft>
+                <a:spcPts val="300"/>
+              </a:spcAft>
+              <a:buNone/>
+            </a:pPr>
+            <a:r>
+              <a:rPr lang="en-US" sz="1200" i="1" dirty="0">
+                <a:solidFill>
+                  <a:srgbClr val="1A1A1A"/>
+                </a:solidFill>
+                <a:latin typeface="Georgia" pitchFamily="34" charset="0"/>
+                <a:ea typeface="Georgia" pitchFamily="34" charset="-122"/>
+                <a:cs typeface="Georgia" pitchFamily="34" charset="-120"/>
+              </a:rPr>
+              <a:t>"Indic ecology says these aren't separate problems."</a:t>
             </a:r>
             <a:endParaRPr lang="en-US" sz="1200" dirty="0"/>
           </a:p>
@@ -3861,7 +4089,7 @@
       </p:sp>
       <p:sp>
         <p:nvSpPr>
-          <p:cNvPr id="5" name="Text 3"/>
+          <p:cNvPr id="9" name="Text 7"/>
           <p:cNvSpPr/>
           <p:nvPr/>
         </p:nvSpPr>

--- a/exports/pptx/lessons/senior-module-13-indic-ecology/day-02-five-elements-as-frame.pptx
+++ b/exports/pptx/lessons/senior-module-13-indic-ecology/day-02-five-elements-as-frame.pptx
@@ -16,9 +16,12 @@
     <p:sldId id="264" r:id="rId10"/>
     <p:sldId id="265" r:id="rId11"/>
     <p:sldId id="266" r:id="rId12"/>
+    <p:sldId id="267" r:id="rId13"/>
+    <p:sldId id="268" r:id="rId14"/>
+    <p:sldId id="269" r:id="rId15"/>
   </p:sldIdLst>
   <p:notesMasterIdLst>
-    <p:notesMasterId r:id="rId13"/>
+    <p:notesMasterId r:id="rId16"/>
   </p:notesMasterIdLst>
   <p:sldSz cx="9144000" cy="5143500"/>
   <p:notesSz cx="5143500" cy="9144000"/>
@@ -712,6 +715,270 @@
             <a:fld id="{F7021451-1387-4CA6-816F-3879F97B5CBC}" type="slidenum">
               <a:rPr lang="en-US"/>
               <a:t>11</a:t>
+            </a:fld>
+            <a:endParaRPr lang="en-US"/>
+          </a:p>
+        </p:txBody>
+      </p:sp>
+    </p:spTree>
+    <p:extLst>
+      <p:ext uri="{BB962C8B-B14F-4D97-AF65-F5344CB8AC3E}">
+        <p14:creationId xmlns:p14="http://schemas.microsoft.com/office/powerpoint/2010/main" val="1024086991"/>
+      </p:ext>
+    </p:extLst>
+  </p:cSld>
+  <p:clrMapOvr>
+    <a:masterClrMapping/>
+  </p:clrMapOvr>
+</p:notes>
+</file>
+
+<file path=ppt/notesSlides/notesSlide12.xml><?xml version="1.0" encoding="utf-8"?>
+<p:notes xmlns:a="http://schemas.openxmlformats.org/drawingml/2006/main" xmlns:r="http://schemas.openxmlformats.org/officeDocument/2006/relationships" xmlns:p="http://schemas.openxmlformats.org/presentationml/2006/main">
+  <p:cSld>
+    <p:spTree>
+      <p:nvGrpSpPr>
+        <p:cNvPr id="1" name=""/>
+        <p:cNvGrpSpPr/>
+        <p:nvPr/>
+      </p:nvGrpSpPr>
+      <p:grpSpPr>
+        <a:xfrm>
+          <a:off x="0" y="0"/>
+          <a:ext cx="0" cy="0"/>
+          <a:chOff x="0" y="0"/>
+          <a:chExt cx="0" cy="0"/>
+        </a:xfrm>
+      </p:grpSpPr>
+      <p:sp>
+        <p:nvSpPr>
+          <p:cNvPr id="2" name="Slide Image Placeholder 1"/>
+          <p:cNvSpPr>
+            <a:spLocks noGrp="1" noRot="1" noChangeAspect="1"/>
+          </p:cNvSpPr>
+          <p:nvPr>
+            <p:ph type="sldImg"/>
+          </p:nvPr>
+        </p:nvSpPr>
+        <p:spPr/>
+      </p:sp>
+      <p:sp>
+        <p:nvSpPr>
+          <p:cNvPr id="3" name="Notes Placeholder 2"/>
+          <p:cNvSpPr>
+            <a:spLocks noGrp="1"/>
+          </p:cNvSpPr>
+          <p:nvPr>
+            <p:ph type="body" idx="1"/>
+          </p:nvPr>
+        </p:nvSpPr>
+        <p:spPr/>
+        <p:txBody>
+          <a:bodyPr/>
+          <a:lstStyle/>
+          <a:p>
+            <a:r>
+              <a:rPr lang="en-US" dirty="0"/>
+              <a:t/>
+            </a:r>
+            <a:endParaRPr lang="en-US" dirty="0"/>
+          </a:p>
+        </p:txBody>
+      </p:sp>
+      <p:sp>
+        <p:nvSpPr>
+          <p:cNvPr id="4" name="Slide Number Placeholder 3"/>
+          <p:cNvSpPr>
+            <a:spLocks noGrp="1"/>
+          </p:cNvSpPr>
+          <p:nvPr>
+            <p:ph type="sldNum" sz="quarter" idx="10"/>
+          </p:nvPr>
+        </p:nvSpPr>
+        <p:spPr/>
+        <p:txBody>
+          <a:bodyPr/>
+          <a:lstStyle/>
+          <a:p>
+            <a:fld id="{F7021451-1387-4CA6-816F-3879F97B5CBC}" type="slidenum">
+              <a:rPr lang="en-US"/>
+              <a:t>12</a:t>
+            </a:fld>
+            <a:endParaRPr lang="en-US"/>
+          </a:p>
+        </p:txBody>
+      </p:sp>
+    </p:spTree>
+    <p:extLst>
+      <p:ext uri="{BB962C8B-B14F-4D97-AF65-F5344CB8AC3E}">
+        <p14:creationId xmlns:p14="http://schemas.microsoft.com/office/powerpoint/2010/main" val="1024086991"/>
+      </p:ext>
+    </p:extLst>
+  </p:cSld>
+  <p:clrMapOvr>
+    <a:masterClrMapping/>
+  </p:clrMapOvr>
+</p:notes>
+</file>
+
+<file path=ppt/notesSlides/notesSlide13.xml><?xml version="1.0" encoding="utf-8"?>
+<p:notes xmlns:a="http://schemas.openxmlformats.org/drawingml/2006/main" xmlns:r="http://schemas.openxmlformats.org/officeDocument/2006/relationships" xmlns:p="http://schemas.openxmlformats.org/presentationml/2006/main">
+  <p:cSld>
+    <p:spTree>
+      <p:nvGrpSpPr>
+        <p:cNvPr id="1" name=""/>
+        <p:cNvGrpSpPr/>
+        <p:nvPr/>
+      </p:nvGrpSpPr>
+      <p:grpSpPr>
+        <a:xfrm>
+          <a:off x="0" y="0"/>
+          <a:ext cx="0" cy="0"/>
+          <a:chOff x="0" y="0"/>
+          <a:chExt cx="0" cy="0"/>
+        </a:xfrm>
+      </p:grpSpPr>
+      <p:sp>
+        <p:nvSpPr>
+          <p:cNvPr id="2" name="Slide Image Placeholder 1"/>
+          <p:cNvSpPr>
+            <a:spLocks noGrp="1" noRot="1" noChangeAspect="1"/>
+          </p:cNvSpPr>
+          <p:nvPr>
+            <p:ph type="sldImg"/>
+          </p:nvPr>
+        </p:nvSpPr>
+        <p:spPr/>
+      </p:sp>
+      <p:sp>
+        <p:nvSpPr>
+          <p:cNvPr id="3" name="Notes Placeholder 2"/>
+          <p:cNvSpPr>
+            <a:spLocks noGrp="1"/>
+          </p:cNvSpPr>
+          <p:nvPr>
+            <p:ph type="body" idx="1"/>
+          </p:nvPr>
+        </p:nvSpPr>
+        <p:spPr/>
+        <p:txBody>
+          <a:bodyPr/>
+          <a:lstStyle/>
+          <a:p>
+            <a:r>
+              <a:rPr lang="en-US" dirty="0"/>
+              <a:t/>
+            </a:r>
+            <a:endParaRPr lang="en-US" dirty="0"/>
+          </a:p>
+        </p:txBody>
+      </p:sp>
+      <p:sp>
+        <p:nvSpPr>
+          <p:cNvPr id="4" name="Slide Number Placeholder 3"/>
+          <p:cNvSpPr>
+            <a:spLocks noGrp="1"/>
+          </p:cNvSpPr>
+          <p:nvPr>
+            <p:ph type="sldNum" sz="quarter" idx="10"/>
+          </p:nvPr>
+        </p:nvSpPr>
+        <p:spPr/>
+        <p:txBody>
+          <a:bodyPr/>
+          <a:lstStyle/>
+          <a:p>
+            <a:fld id="{F7021451-1387-4CA6-816F-3879F97B5CBC}" type="slidenum">
+              <a:rPr lang="en-US"/>
+              <a:t>13</a:t>
+            </a:fld>
+            <a:endParaRPr lang="en-US"/>
+          </a:p>
+        </p:txBody>
+      </p:sp>
+    </p:spTree>
+    <p:extLst>
+      <p:ext uri="{BB962C8B-B14F-4D97-AF65-F5344CB8AC3E}">
+        <p14:creationId xmlns:p14="http://schemas.microsoft.com/office/powerpoint/2010/main" val="1024086991"/>
+      </p:ext>
+    </p:extLst>
+  </p:cSld>
+  <p:clrMapOvr>
+    <a:masterClrMapping/>
+  </p:clrMapOvr>
+</p:notes>
+</file>
+
+<file path=ppt/notesSlides/notesSlide14.xml><?xml version="1.0" encoding="utf-8"?>
+<p:notes xmlns:a="http://schemas.openxmlformats.org/drawingml/2006/main" xmlns:r="http://schemas.openxmlformats.org/officeDocument/2006/relationships" xmlns:p="http://schemas.openxmlformats.org/presentationml/2006/main">
+  <p:cSld>
+    <p:spTree>
+      <p:nvGrpSpPr>
+        <p:cNvPr id="1" name=""/>
+        <p:cNvGrpSpPr/>
+        <p:nvPr/>
+      </p:nvGrpSpPr>
+      <p:grpSpPr>
+        <a:xfrm>
+          <a:off x="0" y="0"/>
+          <a:ext cx="0" cy="0"/>
+          <a:chOff x="0" y="0"/>
+          <a:chExt cx="0" cy="0"/>
+        </a:xfrm>
+      </p:grpSpPr>
+      <p:sp>
+        <p:nvSpPr>
+          <p:cNvPr id="2" name="Slide Image Placeholder 1"/>
+          <p:cNvSpPr>
+            <a:spLocks noGrp="1" noRot="1" noChangeAspect="1"/>
+          </p:cNvSpPr>
+          <p:nvPr>
+            <p:ph type="sldImg"/>
+          </p:nvPr>
+        </p:nvSpPr>
+        <p:spPr/>
+      </p:sp>
+      <p:sp>
+        <p:nvSpPr>
+          <p:cNvPr id="3" name="Notes Placeholder 2"/>
+          <p:cNvSpPr>
+            <a:spLocks noGrp="1"/>
+          </p:cNvSpPr>
+          <p:nvPr>
+            <p:ph type="body" idx="1"/>
+          </p:nvPr>
+        </p:nvSpPr>
+        <p:spPr/>
+        <p:txBody>
+          <a:bodyPr/>
+          <a:lstStyle/>
+          <a:p>
+            <a:r>
+              <a:rPr lang="en-US" dirty="0"/>
+              <a:t/>
+            </a:r>
+            <a:endParaRPr lang="en-US" dirty="0"/>
+          </a:p>
+        </p:txBody>
+      </p:sp>
+      <p:sp>
+        <p:nvSpPr>
+          <p:cNvPr id="4" name="Slide Number Placeholder 3"/>
+          <p:cNvSpPr>
+            <a:spLocks noGrp="1"/>
+          </p:cNvSpPr>
+          <p:nvPr>
+            <p:ph type="sldNum" sz="quarter" idx="10"/>
+          </p:nvPr>
+        </p:nvSpPr>
+        <p:spPr/>
+        <p:txBody>
+          <a:bodyPr/>
+          <a:lstStyle/>
+          <a:p>
+            <a:fld id="{F7021451-1387-4CA6-816F-3879F97B5CBC}" type="slidenum">
+              <a:rPr lang="en-US"/>
+              <a:t>14</a:t>
             </a:fld>
             <a:endParaRPr lang="en-US"/>
           </a:p>
@@ -2011,102 +2278,6 @@
         </p:nvSpPr>
         <p:spPr>
           <a:xfrm>
-            <a:off x="406301" y="1223963"/>
-            <a:ext cx="8498026" cy="274290"/>
-          </a:xfrm>
-          <a:prstGeom prst="rect">
-            <a:avLst/>
-          </a:prstGeom>
-          <a:noFill/>
-          <a:ln/>
-        </p:spPr>
-        <p:txBody>
-          <a:bodyPr wrap="square" lIns="0" tIns="0" rIns="0" bIns="0" rtlCol="0" anchor="t"/>
-          <a:lstStyle/>
-          <a:p>
-            <a:pPr algn="l" indent="0" marL="0">
-              <a:lnSpc>
-                <a:spcPts val="2160"/>
-              </a:lnSpc>
-              <a:spcBef>
-                <a:spcPts val="600"/>
-              </a:spcBef>
-              <a:spcAft>
-                <a:spcPts val="800"/>
-              </a:spcAft>
-              <a:buNone/>
-            </a:pPr>
-            <a:r>
-              <a:rPr lang="en-US" sz="1800" b="1" dirty="0">
-                <a:solidFill>
-                  <a:srgbClr val="997929"/>
-                </a:solidFill>
-                <a:latin typeface="Times New Roman" pitchFamily="34" charset="0"/>
-                <a:ea typeface="Times New Roman" pitchFamily="34" charset="-122"/>
-                <a:cs typeface="Times New Roman" pitchFamily="34" charset="-120"/>
-              </a:rPr>
-              <a:t>Learning objective</a:t>
-            </a:r>
-            <a:endParaRPr lang="en-US" sz="1800" dirty="0"/>
-          </a:p>
-        </p:txBody>
-      </p:sp>
-      <p:sp>
-        <p:nvSpPr>
-          <p:cNvPr id="6" name="Text 4"/>
-          <p:cNvSpPr/>
-          <p:nvPr/>
-        </p:nvSpPr>
-        <p:spPr>
-          <a:xfrm>
-            <a:off x="406301" y="1637854"/>
-            <a:ext cx="8498026" cy="213271"/>
-          </a:xfrm>
-          <a:prstGeom prst="rect">
-            <a:avLst/>
-          </a:prstGeom>
-          <a:noFill/>
-          <a:ln/>
-        </p:spPr>
-        <p:txBody>
-          <a:bodyPr wrap="square" lIns="0" tIns="0" rIns="0" bIns="0" rtlCol="0" anchor="t"/>
-          <a:lstStyle/>
-          <a:p>
-            <a:pPr algn="l" indent="0" marL="0">
-              <a:lnSpc>
-                <a:spcPts val="1680"/>
-              </a:lnSpc>
-              <a:spcBef>
-                <a:spcPts val="300"/>
-              </a:spcBef>
-              <a:spcAft>
-                <a:spcPts val="300"/>
-              </a:spcAft>
-              <a:buNone/>
-            </a:pPr>
-            <a:r>
-              <a:rPr lang="en-US" sz="1200" dirty="0">
-                <a:solidFill>
-                  <a:srgbClr val="1A1A1A"/>
-                </a:solidFill>
-                <a:latin typeface="Georgia" pitchFamily="34" charset="0"/>
-                <a:ea typeface="Georgia" pitchFamily="34" charset="-122"/>
-                <a:cs typeface="Georgia" pitchFamily="34" charset="-120"/>
-              </a:rPr>
-              <a:t>By the end of this lesson, students will: link module 2 pañcabhūta to ecology — interconnection.</a:t>
-            </a:r>
-            <a:endParaRPr lang="en-US" sz="1200" dirty="0"/>
-          </a:p>
-        </p:txBody>
-      </p:sp>
-      <p:sp>
-        <p:nvSpPr>
-          <p:cNvPr id="7" name="Text 5"/>
-          <p:cNvSpPr/>
-          <p:nvPr/>
-        </p:nvSpPr>
-        <p:spPr>
-          <a:xfrm>
             <a:off x="406301" y="4434929"/>
             <a:ext cx="8498026" cy="213271"/>
           </a:xfrm>
@@ -2251,7 +2422,7 @@
                 <a:ea typeface="Times New Roman" pitchFamily="34" charset="-122"/>
                 <a:cs typeface="Times New Roman" pitchFamily="34" charset="-120"/>
               </a:rPr>
-              <a:t>Differentiation</a:t>
+              <a:t>Activity (15 min)</a:t>
             </a:r>
             <a:endParaRPr lang="en-US" sz="1800" dirty="0"/>
           </a:p>
@@ -2265,8 +2436,8 @@
         </p:nvSpPr>
         <p:spPr>
           <a:xfrm>
-            <a:off x="634901" y="883593"/>
-            <a:ext cx="8102798" cy="525661"/>
+            <a:off x="406301" y="870942"/>
+            <a:ext cx="8498026" cy="436066"/>
           </a:xfrm>
           <a:prstGeom prst="rect">
             <a:avLst/>
@@ -2278,31 +2449,13 @@
           <a:bodyPr wrap="square" lIns="0" tIns="0" rIns="0" bIns="0" rtlCol="0" anchor="t"/>
           <a:lstStyle/>
           <a:p>
-            <a:pPr algn="l" marL="342900" indent="-342900">
-              <a:lnSpc>
-                <a:spcPts val="1620"/>
-              </a:lnSpc>
-              <a:spcAft>
-                <a:spcPts val="300"/>
-              </a:spcAft>
-              <a:buSzPct val="100000"/>
-              <a:buChar char="•"/>
-            </a:pPr>
-            <a:r>
-              <a:rPr lang="en-US" sz="1200" b="1" dirty="0">
-                <a:solidFill>
-                  <a:srgbClr val="1A1A1A"/>
-                </a:solidFill>
-                <a:latin typeface="Georgia" pitchFamily="34" charset="0"/>
-                <a:ea typeface="Georgia" pitchFamily="34" charset="-122"/>
-                <a:cs typeface="Georgia" pitchFamily="34" charset="-120"/>
-              </a:rPr>
-              <a:t>Extension:</a:t>
-            </a:r>
             <a:pPr algn="l" indent="0" marL="0">
               <a:lnSpc>
-                <a:spcPts val="1620"/>
-              </a:lnSpc>
+                <a:spcPts val="1680"/>
+              </a:lnSpc>
+              <a:spcBef>
+                <a:spcPts val="300"/>
+              </a:spcBef>
               <a:spcAft>
                 <a:spcPts val="300"/>
               </a:spcAft>
@@ -2317,36 +2470,38 @@
                 <a:ea typeface="Georgia" pitchFamily="34" charset="-122"/>
                 <a:cs typeface="Georgia" pitchFamily="34" charset="-120"/>
               </a:rPr>
-              <a:t> offer one open question or extra problem for fast finishers.</a:t>
-            </a:r>
-            <a:endParaRPr lang="en-US" sz="1200" dirty="0"/>
-          </a:p>
-          <a:p>
-            <a:pPr algn="l" marL="342900" indent="-342900">
-              <a:lnSpc>
-                <a:spcPts val="1620"/>
-              </a:lnSpc>
-              <a:spcAft>
-                <a:spcPts val="300"/>
-              </a:spcAft>
-              <a:buSzPct val="100000"/>
-              <a:buChar char="•"/>
-            </a:pPr>
-            <a:r>
-              <a:rPr lang="en-US" sz="1200" b="1" dirty="0">
-                <a:solidFill>
-                  <a:srgbClr val="1A1A1A"/>
-                </a:solidFill>
-                <a:latin typeface="Georgia" pitchFamily="34" charset="0"/>
-                <a:ea typeface="Georgia" pitchFamily="34" charset="-122"/>
-                <a:cs typeface="Georgia" pitchFamily="34" charset="-120"/>
-              </a:rPr>
-              <a:t>Support:</a:t>
+              <a:t>A scaled version of </a:t>
             </a:r>
             <a:pPr algn="l" indent="0" marL="0">
               <a:lnSpc>
-                <a:spcPts val="1620"/>
-              </a:lnSpc>
+                <a:spcPts val="1680"/>
+              </a:lnSpc>
+              <a:spcBef>
+                <a:spcPts val="300"/>
+              </a:spcBef>
+              <a:spcAft>
+                <a:spcPts val="300"/>
+              </a:spcAft>
+              <a:buNone/>
+            </a:pPr>
+            <a:r>
+              <a:rPr lang="en-US" sz="1200" i="1" dirty="0">
+                <a:solidFill>
+                  <a:srgbClr val="1A1A1A"/>
+                </a:solidFill>
+                <a:latin typeface="Georgia" pitchFamily="34" charset="0"/>
+                <a:ea typeface="Georgia" pitchFamily="34" charset="-122"/>
+                <a:cs typeface="Georgia" pitchFamily="34" charset="-120"/>
+              </a:rPr>
+              <a:t>Sacred Grove (or Local Ecology) Mapping</a:t>
+            </a:r>
+            <a:pPr algn="l" indent="0" marL="0">
+              <a:lnSpc>
+                <a:spcPts val="1680"/>
+              </a:lnSpc>
+              <a:spcBef>
+                <a:spcPts val="300"/>
+              </a:spcBef>
               <a:spcAft>
                 <a:spcPts val="300"/>
               </a:spcAft>
@@ -2361,7 +2516,53 @@
                 <a:ea typeface="Georgia" pitchFamily="34" charset="-122"/>
                 <a:cs typeface="Georgia" pitchFamily="34" charset="-120"/>
               </a:rPr>
-              <a:t> pair students who need scaffolds; offer partial outlines.</a:t>
+              <a:t> (see </a:t>
+            </a:r>
+            <a:pPr algn="l" indent="0" marL="0">
+              <a:lnSpc>
+                <a:spcPts val="1680"/>
+              </a:lnSpc>
+              <a:spcBef>
+                <a:spcPts val="300"/>
+              </a:spcBef>
+              <a:spcAft>
+                <a:spcPts val="300"/>
+              </a:spcAft>
+              <a:buNone/>
+            </a:pPr>
+            <a:r>
+              <a:rPr lang="en-US" sz="1200" dirty="0">
+                <a:solidFill>
+                  <a:srgbClr val="1A1A1A"/>
+                </a:solidFill>
+                <a:latin typeface="Georgia" pitchFamily="34" charset="0"/>
+                <a:ea typeface="Georgia" pitchFamily="34" charset="-122"/>
+                <a:cs typeface="Georgia" pitchFamily="34" charset="-120"/>
+              </a:rPr>
+              <a:t>activities/</a:t>
+            </a:r>
+            <a:pPr algn="l" indent="0" marL="0">
+              <a:lnSpc>
+                <a:spcPts val="1680"/>
+              </a:lnSpc>
+              <a:spcBef>
+                <a:spcPts val="300"/>
+              </a:spcBef>
+              <a:spcAft>
+                <a:spcPts val="300"/>
+              </a:spcAft>
+              <a:buNone/>
+            </a:pPr>
+            <a:r>
+              <a:rPr lang="en-US" sz="1200" dirty="0">
+                <a:solidFill>
+                  <a:srgbClr val="1A1A1A"/>
+                </a:solidFill>
+                <a:latin typeface="Georgia" pitchFamily="34" charset="0"/>
+                <a:ea typeface="Georgia" pitchFamily="34" charset="-122"/>
+                <a:cs typeface="Georgia" pitchFamily="34" charset="-120"/>
+              </a:rPr>
+              <a:t>). Today's slice: focus on the part of the activity that reinforces Five Elements as Ecological Frame.</a:t>
             </a:r>
             <a:endParaRPr lang="en-US" sz="1200" dirty="0"/>
           </a:p>
@@ -2519,7 +2720,7 @@
                 <a:ea typeface="Times New Roman" pitchFamily="34" charset="-122"/>
                 <a:cs typeface="Times New Roman" pitchFamily="34" charset="-120"/>
               </a:rPr>
-              <a:t>Teacher notes</a:t>
+              <a:t>Wrap-up (5 min)</a:t>
             </a:r>
             <a:endParaRPr lang="en-US" sz="1800" dirty="0"/>
           </a:p>
@@ -2533,8 +2734,8 @@
         </p:nvSpPr>
         <p:spPr>
           <a:xfrm>
-            <a:off x="406301" y="870942"/>
-            <a:ext cx="8498026" cy="426541"/>
+            <a:off x="634901" y="883593"/>
+            <a:ext cx="8102798" cy="525661"/>
           </a:xfrm>
           <a:prstGeom prst="rect">
             <a:avLst/>
@@ -2546,8 +2747,98 @@
           <a:bodyPr wrap="square" lIns="0" tIns="0" rIns="0" bIns="0" rtlCol="0" anchor="t"/>
           <a:lstStyle/>
           <a:p>
+            <a:pPr algn="l" marL="342900" indent="-342900">
+              <a:lnSpc>
+                <a:spcPts val="1620"/>
+              </a:lnSpc>
+              <a:spcAft>
+                <a:spcPts val="300"/>
+              </a:spcAft>
+              <a:buSzPct val="100000"/>
+              <a:buChar char="•"/>
+            </a:pPr>
+            <a:r>
+              <a:rPr lang="en-US" sz="1200" dirty="0">
+                <a:solidFill>
+                  <a:srgbClr val="1A1A1A"/>
+                </a:solidFill>
+                <a:latin typeface="Georgia" pitchFamily="34" charset="0"/>
+                <a:ea typeface="Georgia" pitchFamily="34" charset="-122"/>
+                <a:cs typeface="Georgia" pitchFamily="34" charset="-120"/>
+              </a:rPr>
+              <a:t>One-sentence exit ticket: </a:t>
+            </a:r>
             <a:pPr algn="l" indent="0" marL="0">
               <a:lnSpc>
+                <a:spcPts val="1620"/>
+              </a:lnSpc>
+              <a:spcAft>
+                <a:spcPts val="300"/>
+              </a:spcAft>
+              <a:buNone/>
+            </a:pPr>
+            <a:r>
+              <a:rPr lang="en-US" sz="1200" i="1" dirty="0">
+                <a:solidFill>
+                  <a:srgbClr val="1A1A1A"/>
+                </a:solidFill>
+                <a:latin typeface="Georgia" pitchFamily="34" charset="0"/>
+                <a:ea typeface="Georgia" pitchFamily="34" charset="-122"/>
+                <a:cs typeface="Georgia" pitchFamily="34" charset="-120"/>
+              </a:rPr>
+              <a:t>"What's one thing you learned today?"</a:t>
+            </a:r>
+            <a:endParaRPr lang="en-US" sz="1200" dirty="0"/>
+          </a:p>
+          <a:p>
+            <a:pPr algn="l" marL="342900" indent="-342900">
+              <a:lnSpc>
+                <a:spcPts val="1620"/>
+              </a:lnSpc>
+              <a:spcAft>
+                <a:spcPts val="300"/>
+              </a:spcAft>
+              <a:buSzPct val="100000"/>
+              <a:buChar char="•"/>
+            </a:pPr>
+            <a:r>
+              <a:rPr lang="en-US" sz="1200" dirty="0">
+                <a:solidFill>
+                  <a:srgbClr val="1A1A1A"/>
+                </a:solidFill>
+                <a:latin typeface="Georgia" pitchFamily="34" charset="0"/>
+                <a:ea typeface="Georgia" pitchFamily="34" charset="-122"/>
+                <a:cs typeface="Georgia" pitchFamily="34" charset="-120"/>
+              </a:rPr>
+              <a:t>Preview tomorrow.</a:t>
+            </a:r>
+            <a:endParaRPr lang="en-US" sz="1200" dirty="0"/>
+          </a:p>
+        </p:txBody>
+      </p:sp>
+      <p:sp>
+        <p:nvSpPr>
+          <p:cNvPr id="5" name="Text 3"/>
+          <p:cNvSpPr/>
+          <p:nvPr/>
+        </p:nvSpPr>
+        <p:spPr>
+          <a:xfrm>
+            <a:off x="406301" y="4434929"/>
+            <a:ext cx="8498026" cy="213271"/>
+          </a:xfrm>
+          <a:prstGeom prst="rect">
+            <a:avLst/>
+          </a:prstGeom>
+          <a:noFill/>
+          <a:ln/>
+        </p:spPr>
+        <p:txBody>
+          <a:bodyPr wrap="square" lIns="0" tIns="0" rIns="0" bIns="0" rtlCol="0" anchor="t"/>
+          <a:lstStyle/>
+          <a:p>
+            <a:pPr algn="l" indent="0" marL="0">
+              <a:lnSpc>
                 <a:spcPts val="1680"/>
               </a:lnSpc>
               <a:spcBef>
@@ -2567,7 +2858,707 @@
                 <a:ea typeface="Georgia" pitchFamily="34" charset="-122"/>
                 <a:cs typeface="Georgia" pitchFamily="34" charset="-120"/>
               </a:rPr>
-              <a:t>– Citations: at least one quoted verse with citation per module. Day 1 already includes one if applicable; you may add more. – Connect to prior modules where natural (especially Module 2 pañcabhūta).</a:t>
+              <a:t>Senior ·  · IKS Curriculum</a:t>
+            </a:r>
+            <a:endParaRPr lang="en-US" sz="1200" dirty="0"/>
+          </a:p>
+        </p:txBody>
+      </p:sp>
+    </p:spTree>
+  </p:cSld>
+  <p:clrMapOvr>
+    <a:masterClrMapping/>
+  </p:clrMapOvr>
+</p:sld>
+</file>
+
+<file path=ppt/slides/slide12.xml><?xml version="1.0" encoding="utf-8"?>
+<p:sld xmlns:a="http://schemas.openxmlformats.org/drawingml/2006/main" xmlns:r="http://schemas.openxmlformats.org/officeDocument/2006/relationships" xmlns:p="http://schemas.openxmlformats.org/presentationml/2006/main">
+  <p:cSld name="Slide 12">
+    <p:bg>
+      <p:bgPr>
+        <a:solidFill>
+          <a:srgbClr val="FAF7F2"/>
+        </a:solidFill>
+      </p:bgPr>
+    </p:bg>
+    <p:spTree>
+      <p:nvGrpSpPr>
+        <p:cNvPr id="1" name=""/>
+        <p:cNvGrpSpPr/>
+        <p:nvPr/>
+      </p:nvGrpSpPr>
+      <p:grpSpPr>
+        <a:xfrm>
+          <a:off x="0" y="0"/>
+          <a:ext cx="0" cy="0"/>
+          <a:chOff x="0" y="0"/>
+          <a:chExt cx="0" cy="0"/>
+        </a:xfrm>
+      </p:grpSpPr>
+      <p:sp>
+        <p:nvSpPr>
+          <p:cNvPr id="2" name="Text 0"/>
+          <p:cNvSpPr/>
+          <p:nvPr/>
+        </p:nvSpPr>
+        <p:spPr>
+          <a:xfrm>
+            <a:off x="0" y="0"/>
+            <a:ext cx="9144000" cy="101501"/>
+          </a:xfrm>
+          <a:prstGeom prst="rect">
+            <a:avLst/>
+          </a:prstGeom>
+          <a:solidFill>
+            <a:srgbClr val="5D1D2E"/>
+          </a:solidFill>
+          <a:ln/>
+        </p:spPr>
+        <p:txBody>
+          <a:bodyPr wrap="square" rtlCol="0" anchor="ctr"/>
+          <a:lstStyle/>
+          <a:p>
+            <a:pPr indent="0" marL="0">
+              <a:buNone/>
+            </a:pPr>
+            <a:endParaRPr lang="en-US" dirty="0"/>
+          </a:p>
+        </p:txBody>
+      </p:sp>
+      <p:sp>
+        <p:nvSpPr>
+          <p:cNvPr id="3" name="Text 1"/>
+          <p:cNvSpPr/>
+          <p:nvPr/>
+        </p:nvSpPr>
+        <p:spPr>
+          <a:xfrm>
+            <a:off x="406301" y="457051"/>
+            <a:ext cx="8498026" cy="274290"/>
+          </a:xfrm>
+          <a:prstGeom prst="rect">
+            <a:avLst/>
+          </a:prstGeom>
+          <a:noFill/>
+          <a:ln/>
+        </p:spPr>
+        <p:txBody>
+          <a:bodyPr wrap="square" lIns="0" tIns="0" rIns="0" bIns="0" rtlCol="0" anchor="t"/>
+          <a:lstStyle/>
+          <a:p>
+            <a:pPr algn="l" indent="0" marL="0">
+              <a:lnSpc>
+                <a:spcPts val="2160"/>
+              </a:lnSpc>
+              <a:spcBef>
+                <a:spcPts val="600"/>
+              </a:spcBef>
+              <a:spcAft>
+                <a:spcPts val="800"/>
+              </a:spcAft>
+              <a:buNone/>
+            </a:pPr>
+            <a:r>
+              <a:rPr lang="en-US" sz="1800" b="1" dirty="0">
+                <a:solidFill>
+                  <a:srgbClr val="997929"/>
+                </a:solidFill>
+                <a:latin typeface="Times New Roman" pitchFamily="34" charset="0"/>
+                <a:ea typeface="Times New Roman" pitchFamily="34" charset="-122"/>
+                <a:cs typeface="Times New Roman" pitchFamily="34" charset="-120"/>
+              </a:rPr>
+              <a:t>Homework</a:t>
+            </a:r>
+            <a:endParaRPr lang="en-US" sz="1800" dirty="0"/>
+          </a:p>
+        </p:txBody>
+      </p:sp>
+      <p:sp>
+        <p:nvSpPr>
+          <p:cNvPr id="4" name="Text 2"/>
+          <p:cNvSpPr/>
+          <p:nvPr/>
+        </p:nvSpPr>
+        <p:spPr>
+          <a:xfrm>
+            <a:off x="406301" y="870942"/>
+            <a:ext cx="8498026" cy="222796"/>
+          </a:xfrm>
+          <a:prstGeom prst="rect">
+            <a:avLst/>
+          </a:prstGeom>
+          <a:noFill/>
+          <a:ln/>
+        </p:spPr>
+        <p:txBody>
+          <a:bodyPr wrap="square" lIns="0" tIns="0" rIns="0" bIns="0" rtlCol="0" anchor="t"/>
+          <a:lstStyle/>
+          <a:p>
+            <a:pPr algn="l" indent="0" marL="0">
+              <a:lnSpc>
+                <a:spcPts val="1680"/>
+              </a:lnSpc>
+              <a:spcBef>
+                <a:spcPts val="300"/>
+              </a:spcBef>
+              <a:spcAft>
+                <a:spcPts val="300"/>
+              </a:spcAft>
+              <a:buNone/>
+            </a:pPr>
+            <a:r>
+              <a:rPr lang="en-US" sz="1200" dirty="0">
+                <a:solidFill>
+                  <a:srgbClr val="1A1A1A"/>
+                </a:solidFill>
+                <a:latin typeface="Georgia" pitchFamily="34" charset="0"/>
+                <a:ea typeface="Georgia" pitchFamily="34" charset="-122"/>
+                <a:cs typeface="Georgia" pitchFamily="34" charset="-120"/>
+              </a:rPr>
+              <a:t>(See </a:t>
+            </a:r>
+            <a:pPr algn="l" indent="0" marL="0">
+              <a:lnSpc>
+                <a:spcPts val="1680"/>
+              </a:lnSpc>
+              <a:spcBef>
+                <a:spcPts val="300"/>
+              </a:spcBef>
+              <a:spcAft>
+                <a:spcPts val="300"/>
+              </a:spcAft>
+              <a:buNone/>
+            </a:pPr>
+            <a:r>
+              <a:rPr lang="en-US" sz="1200" dirty="0">
+                <a:solidFill>
+                  <a:srgbClr val="1A1A1A"/>
+                </a:solidFill>
+                <a:latin typeface="Georgia" pitchFamily="34" charset="0"/>
+                <a:ea typeface="Georgia" pitchFamily="34" charset="-122"/>
+                <a:cs typeface="Georgia" pitchFamily="34" charset="-120"/>
+              </a:rPr>
+              <a:t>homework.md</a:t>
+            </a:r>
+            <a:pPr algn="l" indent="0" marL="0">
+              <a:lnSpc>
+                <a:spcPts val="1680"/>
+              </a:lnSpc>
+              <a:spcBef>
+                <a:spcPts val="300"/>
+              </a:spcBef>
+              <a:spcAft>
+                <a:spcPts val="300"/>
+              </a:spcAft>
+              <a:buNone/>
+            </a:pPr>
+            <a:r>
+              <a:rPr lang="en-US" sz="1200" dirty="0">
+                <a:solidFill>
+                  <a:srgbClr val="1A1A1A"/>
+                </a:solidFill>
+                <a:latin typeface="Georgia" pitchFamily="34" charset="0"/>
+                <a:ea typeface="Georgia" pitchFamily="34" charset="-122"/>
+                <a:cs typeface="Georgia" pitchFamily="34" charset="-120"/>
+              </a:rPr>
+              <a:t> for today's task.)</a:t>
+            </a:r>
+            <a:endParaRPr lang="en-US" sz="1200" dirty="0"/>
+          </a:p>
+        </p:txBody>
+      </p:sp>
+      <p:sp>
+        <p:nvSpPr>
+          <p:cNvPr id="5" name="Text 3"/>
+          <p:cNvSpPr/>
+          <p:nvPr/>
+        </p:nvSpPr>
+        <p:spPr>
+          <a:xfrm>
+            <a:off x="406301" y="4434929"/>
+            <a:ext cx="8498026" cy="213271"/>
+          </a:xfrm>
+          <a:prstGeom prst="rect">
+            <a:avLst/>
+          </a:prstGeom>
+          <a:noFill/>
+          <a:ln/>
+        </p:spPr>
+        <p:txBody>
+          <a:bodyPr wrap="square" lIns="0" tIns="0" rIns="0" bIns="0" rtlCol="0" anchor="t"/>
+          <a:lstStyle/>
+          <a:p>
+            <a:pPr algn="l" indent="0" marL="0">
+              <a:lnSpc>
+                <a:spcPts val="1680"/>
+              </a:lnSpc>
+              <a:spcBef>
+                <a:spcPts val="300"/>
+              </a:spcBef>
+              <a:spcAft>
+                <a:spcPts val="300"/>
+              </a:spcAft>
+              <a:buNone/>
+            </a:pPr>
+            <a:r>
+              <a:rPr lang="en-US" sz="1200" dirty="0">
+                <a:solidFill>
+                  <a:srgbClr val="1A1A1A"/>
+                </a:solidFill>
+                <a:latin typeface="Georgia" pitchFamily="34" charset="0"/>
+                <a:ea typeface="Georgia" pitchFamily="34" charset="-122"/>
+                <a:cs typeface="Georgia" pitchFamily="34" charset="-120"/>
+              </a:rPr>
+              <a:t>Senior ·  · IKS Curriculum</a:t>
+            </a:r>
+            <a:endParaRPr lang="en-US" sz="1200" dirty="0"/>
+          </a:p>
+        </p:txBody>
+      </p:sp>
+    </p:spTree>
+  </p:cSld>
+  <p:clrMapOvr>
+    <a:masterClrMapping/>
+  </p:clrMapOvr>
+</p:sld>
+</file>
+
+<file path=ppt/slides/slide13.xml><?xml version="1.0" encoding="utf-8"?>
+<p:sld xmlns:a="http://schemas.openxmlformats.org/drawingml/2006/main" xmlns:r="http://schemas.openxmlformats.org/officeDocument/2006/relationships" xmlns:p="http://schemas.openxmlformats.org/presentationml/2006/main">
+  <p:cSld name="Slide 13">
+    <p:bg>
+      <p:bgPr>
+        <a:solidFill>
+          <a:srgbClr val="FAF7F2"/>
+        </a:solidFill>
+      </p:bgPr>
+    </p:bg>
+    <p:spTree>
+      <p:nvGrpSpPr>
+        <p:cNvPr id="1" name=""/>
+        <p:cNvGrpSpPr/>
+        <p:nvPr/>
+      </p:nvGrpSpPr>
+      <p:grpSpPr>
+        <a:xfrm>
+          <a:off x="0" y="0"/>
+          <a:ext cx="0" cy="0"/>
+          <a:chOff x="0" y="0"/>
+          <a:chExt cx="0" cy="0"/>
+        </a:xfrm>
+      </p:grpSpPr>
+      <p:sp>
+        <p:nvSpPr>
+          <p:cNvPr id="2" name="Text 0"/>
+          <p:cNvSpPr/>
+          <p:nvPr/>
+        </p:nvSpPr>
+        <p:spPr>
+          <a:xfrm>
+            <a:off x="0" y="0"/>
+            <a:ext cx="9144000" cy="101501"/>
+          </a:xfrm>
+          <a:prstGeom prst="rect">
+            <a:avLst/>
+          </a:prstGeom>
+          <a:solidFill>
+            <a:srgbClr val="5D1D2E"/>
+          </a:solidFill>
+          <a:ln/>
+        </p:spPr>
+        <p:txBody>
+          <a:bodyPr wrap="square" rtlCol="0" anchor="ctr"/>
+          <a:lstStyle/>
+          <a:p>
+            <a:pPr indent="0" marL="0">
+              <a:buNone/>
+            </a:pPr>
+            <a:endParaRPr lang="en-US" dirty="0"/>
+          </a:p>
+        </p:txBody>
+      </p:sp>
+      <p:sp>
+        <p:nvSpPr>
+          <p:cNvPr id="3" name="Text 1"/>
+          <p:cNvSpPr/>
+          <p:nvPr/>
+        </p:nvSpPr>
+        <p:spPr>
+          <a:xfrm>
+            <a:off x="406301" y="457051"/>
+            <a:ext cx="8498026" cy="274290"/>
+          </a:xfrm>
+          <a:prstGeom prst="rect">
+            <a:avLst/>
+          </a:prstGeom>
+          <a:noFill/>
+          <a:ln/>
+        </p:spPr>
+        <p:txBody>
+          <a:bodyPr wrap="square" lIns="0" tIns="0" rIns="0" bIns="0" rtlCol="0" anchor="t"/>
+          <a:lstStyle/>
+          <a:p>
+            <a:pPr algn="l" indent="0" marL="0">
+              <a:lnSpc>
+                <a:spcPts val="2160"/>
+              </a:lnSpc>
+              <a:spcBef>
+                <a:spcPts val="600"/>
+              </a:spcBef>
+              <a:spcAft>
+                <a:spcPts val="800"/>
+              </a:spcAft>
+              <a:buNone/>
+            </a:pPr>
+            <a:r>
+              <a:rPr lang="en-US" sz="1800" b="1" dirty="0">
+                <a:solidFill>
+                  <a:srgbClr val="997929"/>
+                </a:solidFill>
+                <a:latin typeface="Times New Roman" pitchFamily="34" charset="0"/>
+                <a:ea typeface="Times New Roman" pitchFamily="34" charset="-122"/>
+                <a:cs typeface="Times New Roman" pitchFamily="34" charset="-120"/>
+              </a:rPr>
+              <a:t>Differentiation</a:t>
+            </a:r>
+            <a:endParaRPr lang="en-US" sz="1800" dirty="0"/>
+          </a:p>
+        </p:txBody>
+      </p:sp>
+      <p:sp>
+        <p:nvSpPr>
+          <p:cNvPr id="4" name="Text 2"/>
+          <p:cNvSpPr/>
+          <p:nvPr/>
+        </p:nvSpPr>
+        <p:spPr>
+          <a:xfrm>
+            <a:off x="634901" y="883593"/>
+            <a:ext cx="8102798" cy="525661"/>
+          </a:xfrm>
+          <a:prstGeom prst="rect">
+            <a:avLst/>
+          </a:prstGeom>
+          <a:noFill/>
+          <a:ln/>
+        </p:spPr>
+        <p:txBody>
+          <a:bodyPr wrap="square" lIns="0" tIns="0" rIns="0" bIns="0" rtlCol="0" anchor="t"/>
+          <a:lstStyle/>
+          <a:p>
+            <a:pPr algn="l" marL="342900" indent="-342900">
+              <a:lnSpc>
+                <a:spcPts val="1620"/>
+              </a:lnSpc>
+              <a:spcAft>
+                <a:spcPts val="300"/>
+              </a:spcAft>
+              <a:buSzPct val="100000"/>
+              <a:buChar char="•"/>
+            </a:pPr>
+            <a:r>
+              <a:rPr lang="en-US" sz="1200" b="1" dirty="0">
+                <a:solidFill>
+                  <a:srgbClr val="1A1A1A"/>
+                </a:solidFill>
+                <a:latin typeface="Georgia" pitchFamily="34" charset="0"/>
+                <a:ea typeface="Georgia" pitchFamily="34" charset="-122"/>
+                <a:cs typeface="Georgia" pitchFamily="34" charset="-120"/>
+              </a:rPr>
+              <a:t>Extension:</a:t>
+            </a:r>
+            <a:pPr algn="l" indent="0" marL="0">
+              <a:lnSpc>
+                <a:spcPts val="1620"/>
+              </a:lnSpc>
+              <a:spcAft>
+                <a:spcPts val="300"/>
+              </a:spcAft>
+              <a:buNone/>
+            </a:pPr>
+            <a:r>
+              <a:rPr lang="en-US" sz="1200" dirty="0">
+                <a:solidFill>
+                  <a:srgbClr val="1A1A1A"/>
+                </a:solidFill>
+                <a:latin typeface="Georgia" pitchFamily="34" charset="0"/>
+                <a:ea typeface="Georgia" pitchFamily="34" charset="-122"/>
+                <a:cs typeface="Georgia" pitchFamily="34" charset="-120"/>
+              </a:rPr>
+              <a:t> offer one open question or extra problem for fast finishers.</a:t>
+            </a:r>
+            <a:endParaRPr lang="en-US" sz="1200" dirty="0"/>
+          </a:p>
+          <a:p>
+            <a:pPr algn="l" marL="342900" indent="-342900">
+              <a:lnSpc>
+                <a:spcPts val="1620"/>
+              </a:lnSpc>
+              <a:spcAft>
+                <a:spcPts val="300"/>
+              </a:spcAft>
+              <a:buSzPct val="100000"/>
+              <a:buChar char="•"/>
+            </a:pPr>
+            <a:r>
+              <a:rPr lang="en-US" sz="1200" b="1" dirty="0">
+                <a:solidFill>
+                  <a:srgbClr val="1A1A1A"/>
+                </a:solidFill>
+                <a:latin typeface="Georgia" pitchFamily="34" charset="0"/>
+                <a:ea typeface="Georgia" pitchFamily="34" charset="-122"/>
+                <a:cs typeface="Georgia" pitchFamily="34" charset="-120"/>
+              </a:rPr>
+              <a:t>Support:</a:t>
+            </a:r>
+            <a:pPr algn="l" indent="0" marL="0">
+              <a:lnSpc>
+                <a:spcPts val="1620"/>
+              </a:lnSpc>
+              <a:spcAft>
+                <a:spcPts val="300"/>
+              </a:spcAft>
+              <a:buNone/>
+            </a:pPr>
+            <a:r>
+              <a:rPr lang="en-US" sz="1200" dirty="0">
+                <a:solidFill>
+                  <a:srgbClr val="1A1A1A"/>
+                </a:solidFill>
+                <a:latin typeface="Georgia" pitchFamily="34" charset="0"/>
+                <a:ea typeface="Georgia" pitchFamily="34" charset="-122"/>
+                <a:cs typeface="Georgia" pitchFamily="34" charset="-120"/>
+              </a:rPr>
+              <a:t> pair students who need scaffolds; offer partial outlines.</a:t>
+            </a:r>
+            <a:endParaRPr lang="en-US" sz="1200" dirty="0"/>
+          </a:p>
+        </p:txBody>
+      </p:sp>
+      <p:sp>
+        <p:nvSpPr>
+          <p:cNvPr id="5" name="Text 3"/>
+          <p:cNvSpPr/>
+          <p:nvPr/>
+        </p:nvSpPr>
+        <p:spPr>
+          <a:xfrm>
+            <a:off x="406301" y="4434929"/>
+            <a:ext cx="8498026" cy="213271"/>
+          </a:xfrm>
+          <a:prstGeom prst="rect">
+            <a:avLst/>
+          </a:prstGeom>
+          <a:noFill/>
+          <a:ln/>
+        </p:spPr>
+        <p:txBody>
+          <a:bodyPr wrap="square" lIns="0" tIns="0" rIns="0" bIns="0" rtlCol="0" anchor="t"/>
+          <a:lstStyle/>
+          <a:p>
+            <a:pPr algn="l" indent="0" marL="0">
+              <a:lnSpc>
+                <a:spcPts val="1680"/>
+              </a:lnSpc>
+              <a:spcBef>
+                <a:spcPts val="300"/>
+              </a:spcBef>
+              <a:spcAft>
+                <a:spcPts val="300"/>
+              </a:spcAft>
+              <a:buNone/>
+            </a:pPr>
+            <a:r>
+              <a:rPr lang="en-US" sz="1200" dirty="0">
+                <a:solidFill>
+                  <a:srgbClr val="1A1A1A"/>
+                </a:solidFill>
+                <a:latin typeface="Georgia" pitchFamily="34" charset="0"/>
+                <a:ea typeface="Georgia" pitchFamily="34" charset="-122"/>
+                <a:cs typeface="Georgia" pitchFamily="34" charset="-120"/>
+              </a:rPr>
+              <a:t>Senior ·  · IKS Curriculum</a:t>
+            </a:r>
+            <a:endParaRPr lang="en-US" sz="1200" dirty="0"/>
+          </a:p>
+        </p:txBody>
+      </p:sp>
+    </p:spTree>
+  </p:cSld>
+  <p:clrMapOvr>
+    <a:masterClrMapping/>
+  </p:clrMapOvr>
+</p:sld>
+</file>
+
+<file path=ppt/slides/slide14.xml><?xml version="1.0" encoding="utf-8"?>
+<p:sld xmlns:a="http://schemas.openxmlformats.org/drawingml/2006/main" xmlns:r="http://schemas.openxmlformats.org/officeDocument/2006/relationships" xmlns:p="http://schemas.openxmlformats.org/presentationml/2006/main">
+  <p:cSld name="Slide 14">
+    <p:bg>
+      <p:bgPr>
+        <a:solidFill>
+          <a:srgbClr val="FAF7F2"/>
+        </a:solidFill>
+      </p:bgPr>
+    </p:bg>
+    <p:spTree>
+      <p:nvGrpSpPr>
+        <p:cNvPr id="1" name=""/>
+        <p:cNvGrpSpPr/>
+        <p:nvPr/>
+      </p:nvGrpSpPr>
+      <p:grpSpPr>
+        <a:xfrm>
+          <a:off x="0" y="0"/>
+          <a:ext cx="0" cy="0"/>
+          <a:chOff x="0" y="0"/>
+          <a:chExt cx="0" cy="0"/>
+        </a:xfrm>
+      </p:grpSpPr>
+      <p:sp>
+        <p:nvSpPr>
+          <p:cNvPr id="2" name="Text 0"/>
+          <p:cNvSpPr/>
+          <p:nvPr/>
+        </p:nvSpPr>
+        <p:spPr>
+          <a:xfrm>
+            <a:off x="0" y="0"/>
+            <a:ext cx="9144000" cy="101501"/>
+          </a:xfrm>
+          <a:prstGeom prst="rect">
+            <a:avLst/>
+          </a:prstGeom>
+          <a:solidFill>
+            <a:srgbClr val="5D1D2E"/>
+          </a:solidFill>
+          <a:ln/>
+        </p:spPr>
+        <p:txBody>
+          <a:bodyPr wrap="square" rtlCol="0" anchor="ctr"/>
+          <a:lstStyle/>
+          <a:p>
+            <a:pPr indent="0" marL="0">
+              <a:buNone/>
+            </a:pPr>
+            <a:endParaRPr lang="en-US" dirty="0"/>
+          </a:p>
+        </p:txBody>
+      </p:sp>
+      <p:sp>
+        <p:nvSpPr>
+          <p:cNvPr id="3" name="Text 1"/>
+          <p:cNvSpPr/>
+          <p:nvPr/>
+        </p:nvSpPr>
+        <p:spPr>
+          <a:xfrm>
+            <a:off x="406301" y="457051"/>
+            <a:ext cx="8498026" cy="274290"/>
+          </a:xfrm>
+          <a:prstGeom prst="rect">
+            <a:avLst/>
+          </a:prstGeom>
+          <a:noFill/>
+          <a:ln/>
+        </p:spPr>
+        <p:txBody>
+          <a:bodyPr wrap="square" lIns="0" tIns="0" rIns="0" bIns="0" rtlCol="0" anchor="t"/>
+          <a:lstStyle/>
+          <a:p>
+            <a:pPr algn="l" indent="0" marL="0">
+              <a:lnSpc>
+                <a:spcPts val="2160"/>
+              </a:lnSpc>
+              <a:spcBef>
+                <a:spcPts val="600"/>
+              </a:spcBef>
+              <a:spcAft>
+                <a:spcPts val="800"/>
+              </a:spcAft>
+              <a:buNone/>
+            </a:pPr>
+            <a:r>
+              <a:rPr lang="en-US" sz="1800" b="1" dirty="0">
+                <a:solidFill>
+                  <a:srgbClr val="997929"/>
+                </a:solidFill>
+                <a:latin typeface="Times New Roman" pitchFamily="34" charset="0"/>
+                <a:ea typeface="Times New Roman" pitchFamily="34" charset="-122"/>
+                <a:cs typeface="Times New Roman" pitchFamily="34" charset="-120"/>
+              </a:rPr>
+              <a:t>Teacher notes</a:t>
+            </a:r>
+            <a:endParaRPr lang="en-US" sz="1800" dirty="0"/>
+          </a:p>
+        </p:txBody>
+      </p:sp>
+      <p:sp>
+        <p:nvSpPr>
+          <p:cNvPr id="4" name="Text 2"/>
+          <p:cNvSpPr/>
+          <p:nvPr/>
+        </p:nvSpPr>
+        <p:spPr>
+          <a:xfrm>
+            <a:off x="634901" y="883593"/>
+            <a:ext cx="8102798" cy="731341"/>
+          </a:xfrm>
+          <a:prstGeom prst="rect">
+            <a:avLst/>
+          </a:prstGeom>
+          <a:noFill/>
+          <a:ln/>
+        </p:spPr>
+        <p:txBody>
+          <a:bodyPr wrap="square" lIns="0" tIns="0" rIns="0" bIns="0" rtlCol="0" anchor="t"/>
+          <a:lstStyle/>
+          <a:p>
+            <a:pPr algn="l" marL="342900" indent="-342900">
+              <a:lnSpc>
+                <a:spcPts val="1620"/>
+              </a:lnSpc>
+              <a:spcAft>
+                <a:spcPts val="300"/>
+              </a:spcAft>
+              <a:buSzPct val="100000"/>
+              <a:buChar char="•"/>
+            </a:pPr>
+            <a:r>
+              <a:rPr lang="en-US" sz="1200" dirty="0">
+                <a:solidFill>
+                  <a:srgbClr val="1A1A1A"/>
+                </a:solidFill>
+                <a:latin typeface="Georgia" pitchFamily="34" charset="0"/>
+                <a:ea typeface="Georgia" pitchFamily="34" charset="-122"/>
+                <a:cs typeface="Georgia" pitchFamily="34" charset="-120"/>
+              </a:rPr>
+              <a:t>Citations: at least one quoted verse with citation per module. Day 1 already includes one if applicable; you may add more.</a:t>
+            </a:r>
+            <a:endParaRPr lang="en-US" sz="1200" dirty="0"/>
+          </a:p>
+          <a:p>
+            <a:pPr algn="l" marL="342900" indent="-342900">
+              <a:lnSpc>
+                <a:spcPts val="1620"/>
+              </a:lnSpc>
+              <a:spcAft>
+                <a:spcPts val="300"/>
+              </a:spcAft>
+              <a:buSzPct val="100000"/>
+              <a:buChar char="•"/>
+            </a:pPr>
+            <a:r>
+              <a:rPr lang="en-US" sz="1200" dirty="0">
+                <a:solidFill>
+                  <a:srgbClr val="1A1A1A"/>
+                </a:solidFill>
+                <a:latin typeface="Georgia" pitchFamily="34" charset="0"/>
+                <a:ea typeface="Georgia" pitchFamily="34" charset="-122"/>
+                <a:cs typeface="Georgia" pitchFamily="34" charset="-120"/>
+              </a:rPr>
+              <a:t>Connect to prior modules where natural (especially Module 2 pañcabhūta).</a:t>
             </a:r>
             <a:endParaRPr lang="en-US" sz="1200" dirty="0"/>
           </a:p>
@@ -2725,7 +3716,7 @@
                 <a:ea typeface="Times New Roman" pitchFamily="34" charset="-122"/>
                 <a:cs typeface="Times New Roman" pitchFamily="34" charset="-120"/>
               </a:rPr>
-              <a:t>Materials</a:t>
+              <a:t>Learning objective</a:t>
             </a:r>
             <a:endParaRPr lang="en-US" sz="1800" dirty="0"/>
           </a:p>
@@ -2773,7 +3764,7 @@
                 <a:ea typeface="Georgia" pitchFamily="34" charset="-122"/>
                 <a:cs typeface="Georgia" pitchFamily="34" charset="-120"/>
               </a:rPr>
-              <a:t>– Whiteboard / chart paper – Notebook, pen per student</a:t>
+              <a:t>By the end of this lesson, students will: link module 2 pañcabhūta to ecology — interconnection.</a:t>
             </a:r>
             <a:endParaRPr lang="en-US" sz="1200" dirty="0"/>
           </a:p>
@@ -2782,52 +3773,6 @@
       <p:sp>
         <p:nvSpPr>
           <p:cNvPr id="5" name="Text 3"/>
-          <p:cNvSpPr/>
-          <p:nvPr/>
-        </p:nvSpPr>
-        <p:spPr>
-          <a:xfrm>
-            <a:off x="634901" y="1173063"/>
-            <a:ext cx="8102798" cy="281880"/>
-          </a:xfrm>
-          <a:prstGeom prst="rect">
-            <a:avLst/>
-          </a:prstGeom>
-          <a:noFill/>
-          <a:ln/>
-        </p:spPr>
-        <p:txBody>
-          <a:bodyPr wrap="square" lIns="0" tIns="0" rIns="0" bIns="0" rtlCol="0" anchor="t"/>
-          <a:lstStyle/>
-          <a:p>
-            <a:pPr algn="l" marL="342900" indent="-342900">
-              <a:lnSpc>
-                <a:spcPts val="1620"/>
-              </a:lnSpc>
-              <a:spcAft>
-                <a:spcPts val="300"/>
-              </a:spcAft>
-              <a:buSzPct val="100000"/>
-              <a:buChar char="•"/>
-            </a:pPr>
-            <a:r>
-              <a:rPr lang="en-US" sz="1200" dirty="0">
-                <a:solidFill>
-                  <a:srgbClr val="1A1A1A"/>
-                </a:solidFill>
-                <a:latin typeface="Georgia" pitchFamily="34" charset="0"/>
-                <a:ea typeface="Georgia" pitchFamily="34" charset="-122"/>
-                <a:cs typeface="Georgia" pitchFamily="34" charset="-120"/>
-              </a:rPr>
-              <a:t>(See lesson-plan.md for any day-specific materials)</a:t>
-            </a:r>
-            <a:endParaRPr lang="en-US" sz="1200" dirty="0"/>
-          </a:p>
-        </p:txBody>
-      </p:sp>
-      <p:sp>
-        <p:nvSpPr>
-          <p:cNvPr id="6" name="Text 4"/>
           <p:cNvSpPr/>
           <p:nvPr/>
         </p:nvSpPr>
@@ -2977,7 +3922,7 @@
                 <a:ea typeface="Times New Roman" pitchFamily="34" charset="-122"/>
                 <a:cs typeface="Times New Roman" pitchFamily="34" charset="-120"/>
               </a:rPr>
-              <a:t>Vocabulary introduced today</a:t>
+              <a:t>Materials</a:t>
             </a:r>
             <a:endParaRPr lang="en-US" sz="1800" dirty="0"/>
           </a:p>
@@ -2992,7 +3937,7 @@
         <p:spPr>
           <a:xfrm>
             <a:off x="634901" y="883593"/>
-            <a:ext cx="8102798" cy="281880"/>
+            <a:ext cx="8102798" cy="769441"/>
           </a:xfrm>
           <a:prstGeom prst="rect">
             <a:avLst/>
@@ -3015,24 +3960,28 @@
               <a:buChar char="•"/>
             </a:pPr>
             <a:r>
-              <a:rPr lang="en-US" sz="1200" i="1" dirty="0">
-                <a:solidFill>
-                  <a:srgbClr val="1A1A1A"/>
-                </a:solidFill>
-                <a:latin typeface="Georgia" pitchFamily="34" charset="0"/>
-                <a:ea typeface="Georgia" pitchFamily="34" charset="-122"/>
-                <a:cs typeface="Georgia" pitchFamily="34" charset="-120"/>
-              </a:rPr>
-              <a:t>yajña</a:t>
-            </a:r>
-            <a:pPr algn="l" indent="0" marL="0">
+              <a:rPr lang="en-US" sz="1200" dirty="0">
+                <a:solidFill>
+                  <a:srgbClr val="1A1A1A"/>
+                </a:solidFill>
+                <a:latin typeface="Georgia" pitchFamily="34" charset="0"/>
+                <a:ea typeface="Georgia" pitchFamily="34" charset="-122"/>
+                <a:cs typeface="Georgia" pitchFamily="34" charset="-120"/>
+              </a:rPr>
+              <a:t>Whiteboard / chart paper</a:t>
+            </a:r>
+            <a:endParaRPr lang="en-US" sz="1200" dirty="0"/>
+          </a:p>
+          <a:p>
+            <a:pPr algn="l" marL="342900" indent="-342900">
               <a:lnSpc>
                 <a:spcPts val="1620"/>
               </a:lnSpc>
               <a:spcAft>
                 <a:spcPts val="300"/>
               </a:spcAft>
-              <a:buNone/>
+              <a:buSzPct val="100000"/>
+              <a:buChar char="•"/>
             </a:pPr>
             <a:r>
               <a:rPr lang="en-US" sz="1200" dirty="0">
@@ -3043,7 +3992,31 @@
                 <a:ea typeface="Georgia" pitchFamily="34" charset="-122"/>
                 <a:cs typeface="Georgia" pitchFamily="34" charset="-120"/>
               </a:rPr>
-              <a:t> (IAST: yajña; lit. "cycle of giving and receiving (BG 3.10–14)")</a:t>
+              <a:t>Notebook, pen per student</a:t>
+            </a:r>
+            <a:endParaRPr lang="en-US" sz="1200" dirty="0"/>
+          </a:p>
+          <a:p>
+            <a:pPr algn="l" marL="342900" indent="-342900">
+              <a:lnSpc>
+                <a:spcPts val="1620"/>
+              </a:lnSpc>
+              <a:spcAft>
+                <a:spcPts val="300"/>
+              </a:spcAft>
+              <a:buSzPct val="100000"/>
+              <a:buChar char="•"/>
+            </a:pPr>
+            <a:r>
+              <a:rPr lang="en-US" sz="1200" dirty="0">
+                <a:solidFill>
+                  <a:srgbClr val="1A1A1A"/>
+                </a:solidFill>
+                <a:latin typeface="Georgia" pitchFamily="34" charset="0"/>
+                <a:ea typeface="Georgia" pitchFamily="34" charset="-122"/>
+                <a:cs typeface="Georgia" pitchFamily="34" charset="-120"/>
+              </a:rPr>
+              <a:t>(See lesson-plan.md for any day-specific materials)</a:t>
             </a:r>
             <a:endParaRPr lang="en-US" sz="1200" dirty="0"/>
           </a:p>
@@ -3201,7 +4174,7 @@
                 <a:ea typeface="Times New Roman" pitchFamily="34" charset="-122"/>
                 <a:cs typeface="Times New Roman" pitchFamily="34" charset="-120"/>
               </a:rPr>
-              <a:t>Lesson flow</a:t>
+              <a:t>Vocabulary introduced today</a:t>
             </a:r>
             <a:endParaRPr lang="en-US" sz="1800" dirty="0"/>
           </a:p>
@@ -3210,6 +4183,72 @@
       <p:sp>
         <p:nvSpPr>
           <p:cNvPr id="4" name="Text 2"/>
+          <p:cNvSpPr/>
+          <p:nvPr/>
+        </p:nvSpPr>
+        <p:spPr>
+          <a:xfrm>
+            <a:off x="634901" y="883593"/>
+            <a:ext cx="8102798" cy="281880"/>
+          </a:xfrm>
+          <a:prstGeom prst="rect">
+            <a:avLst/>
+          </a:prstGeom>
+          <a:noFill/>
+          <a:ln/>
+        </p:spPr>
+        <p:txBody>
+          <a:bodyPr wrap="square" lIns="0" tIns="0" rIns="0" bIns="0" rtlCol="0" anchor="t"/>
+          <a:lstStyle/>
+          <a:p>
+            <a:pPr algn="l" marL="342900" indent="-342900">
+              <a:lnSpc>
+                <a:spcPts val="1620"/>
+              </a:lnSpc>
+              <a:spcAft>
+                <a:spcPts val="300"/>
+              </a:spcAft>
+              <a:buSzPct val="100000"/>
+              <a:buChar char="•"/>
+            </a:pPr>
+            <a:r>
+              <a:rPr lang="en-US" sz="1200" i="1" dirty="0">
+                <a:solidFill>
+                  <a:srgbClr val="1A1A1A"/>
+                </a:solidFill>
+                <a:latin typeface="Georgia" pitchFamily="34" charset="0"/>
+                <a:ea typeface="Georgia" pitchFamily="34" charset="-122"/>
+                <a:cs typeface="Georgia" pitchFamily="34" charset="-120"/>
+              </a:rPr>
+              <a:t>yajña</a:t>
+            </a:r>
+            <a:pPr algn="l" indent="0" marL="0">
+              <a:lnSpc>
+                <a:spcPts val="1620"/>
+              </a:lnSpc>
+              <a:spcAft>
+                <a:spcPts val="300"/>
+              </a:spcAft>
+              <a:buNone/>
+            </a:pPr>
+            <a:r>
+              <a:rPr lang="en-US" sz="1200" dirty="0">
+                <a:solidFill>
+                  <a:srgbClr val="1A1A1A"/>
+                </a:solidFill>
+                <a:latin typeface="Georgia" pitchFamily="34" charset="0"/>
+                <a:ea typeface="Georgia" pitchFamily="34" charset="-122"/>
+                <a:cs typeface="Georgia" pitchFamily="34" charset="-120"/>
+              </a:rPr>
+              <a:t> (IAST: yajña; lit. "cycle of giving and receiving (BG 3.10–14)")</a:t>
+            </a:r>
+            <a:endParaRPr lang="en-US" sz="1200" dirty="0"/>
+          </a:p>
+        </p:txBody>
+      </p:sp>
+      <p:sp>
+        <p:nvSpPr>
+          <p:cNvPr id="5" name="Text 3"/>
           <p:cNvSpPr/>
           <p:nvPr/>
         </p:nvSpPr>
@@ -3359,7 +4398,7 @@
                 <a:ea typeface="Times New Roman" pitchFamily="34" charset="-122"/>
                 <a:cs typeface="Times New Roman" pitchFamily="34" charset="-120"/>
               </a:rPr>
-              <a:t>Warm-up (5 min)</a:t>
+              <a:t>Lesson flow</a:t>
             </a:r>
             <a:endParaRPr lang="en-US" sz="1800" dirty="0"/>
           </a:p>
@@ -3368,100 +4407,6 @@
       <p:sp>
         <p:nvSpPr>
           <p:cNvPr id="4" name="Text 2"/>
-          <p:cNvSpPr/>
-          <p:nvPr/>
-        </p:nvSpPr>
-        <p:spPr>
-          <a:xfrm>
-            <a:off x="406301" y="870942"/>
-            <a:ext cx="8498026" cy="426541"/>
-          </a:xfrm>
-          <a:prstGeom prst="rect">
-            <a:avLst/>
-          </a:prstGeom>
-          <a:noFill/>
-          <a:ln/>
-        </p:spPr>
-        <p:txBody>
-          <a:bodyPr wrap="square" lIns="0" tIns="0" rIns="0" bIns="0" rtlCol="0" anchor="t"/>
-          <a:lstStyle/>
-          <a:p>
-            <a:pPr algn="l" indent="0" marL="0">
-              <a:lnSpc>
-                <a:spcPts val="1680"/>
-              </a:lnSpc>
-              <a:spcBef>
-                <a:spcPts val="300"/>
-              </a:spcBef>
-              <a:spcAft>
-                <a:spcPts val="300"/>
-              </a:spcAft>
-              <a:buNone/>
-            </a:pPr>
-            <a:r>
-              <a:rPr lang="en-US" sz="1200" dirty="0">
-                <a:solidFill>
-                  <a:srgbClr val="1A1A1A"/>
-                </a:solidFill>
-                <a:latin typeface="Georgia" pitchFamily="34" charset="0"/>
-                <a:ea typeface="Georgia" pitchFamily="34" charset="-122"/>
-                <a:cs typeface="Georgia" pitchFamily="34" charset="-120"/>
-              </a:rPr>
-              <a:t>– Daily check-in: one-sentence response to </a:t>
-            </a:r>
-            <a:pPr algn="l" indent="0" marL="0">
-              <a:lnSpc>
-                <a:spcPts val="1680"/>
-              </a:lnSpc>
-              <a:spcBef>
-                <a:spcPts val="300"/>
-              </a:spcBef>
-              <a:spcAft>
-                <a:spcPts val="300"/>
-              </a:spcAft>
-              <a:buNone/>
-            </a:pPr>
-            <a:r>
-              <a:rPr lang="en-US" sz="1200" i="1" dirty="0">
-                <a:solidFill>
-                  <a:srgbClr val="1A1A1A"/>
-                </a:solidFill>
-                <a:latin typeface="Georgia" pitchFamily="34" charset="0"/>
-                <a:ea typeface="Georgia" pitchFamily="34" charset="-122"/>
-                <a:cs typeface="Georgia" pitchFamily="34" charset="-120"/>
-              </a:rPr>
-              <a:t>"What's one thing you remember about yesterday's lesson?"</a:t>
-            </a:r>
-            <a:pPr algn="l" indent="0" marL="0">
-              <a:lnSpc>
-                <a:spcPts val="1680"/>
-              </a:lnSpc>
-              <a:spcBef>
-                <a:spcPts val="300"/>
-              </a:spcBef>
-              <a:spcAft>
-                <a:spcPts val="300"/>
-              </a:spcAft>
-              <a:buNone/>
-            </a:pPr>
-            <a:r>
-              <a:rPr lang="en-US" sz="1200" dirty="0">
-                <a:solidFill>
-                  <a:srgbClr val="1A1A1A"/>
-                </a:solidFill>
-                <a:latin typeface="Georgia" pitchFamily="34" charset="0"/>
-                <a:ea typeface="Georgia" pitchFamily="34" charset="-122"/>
-                <a:cs typeface="Georgia" pitchFamily="34" charset="-120"/>
-              </a:rPr>
-              <a:t> – Hook: introduce a phenomenon or question that motivates today's concept.</a:t>
-            </a:r>
-            <a:endParaRPr lang="en-US" sz="1200" dirty="0"/>
-          </a:p>
-        </p:txBody>
-      </p:sp>
-      <p:sp>
-        <p:nvSpPr>
-          <p:cNvPr id="5" name="Text 3"/>
           <p:cNvSpPr/>
           <p:nvPr/>
         </p:nvSpPr>
@@ -3611,7 +4556,7 @@
                 <a:ea typeface="Times New Roman" pitchFamily="34" charset="-122"/>
                 <a:cs typeface="Times New Roman" pitchFamily="34" charset="-120"/>
               </a:rPr>
-              <a:t>Core (20 min)</a:t>
+              <a:t>Warm-up (5 min)</a:t>
             </a:r>
             <a:endParaRPr lang="en-US" sz="1800" dirty="0"/>
           </a:p>
@@ -3626,7 +4571,7 @@
         <p:spPr>
           <a:xfrm>
             <a:off x="634901" y="883593"/>
-            <a:ext cx="8102798" cy="281880"/>
+            <a:ext cx="8102798" cy="525661"/>
           </a:xfrm>
           <a:prstGeom prst="rect">
             <a:avLst/>
@@ -3649,15 +4594,15 @@
               <a:buChar char="•"/>
             </a:pPr>
             <a:r>
-              <a:rPr lang="en-US" sz="1200" b="1" dirty="0">
-                <a:solidFill>
-                  <a:srgbClr val="1A1A1A"/>
-                </a:solidFill>
-                <a:latin typeface="Georgia" pitchFamily="34" charset="0"/>
-                <a:ea typeface="Georgia" pitchFamily="34" charset="-122"/>
-                <a:cs typeface="Georgia" pitchFamily="34" charset="-120"/>
-              </a:rPr>
-              <a:t>Recall Module 2's pañcabhūta.</a:t>
+              <a:rPr lang="en-US" sz="1200" dirty="0">
+                <a:solidFill>
+                  <a:srgbClr val="1A1A1A"/>
+                </a:solidFill>
+                <a:latin typeface="Georgia" pitchFamily="34" charset="0"/>
+                <a:ea typeface="Georgia" pitchFamily="34" charset="-122"/>
+                <a:cs typeface="Georgia" pitchFamily="34" charset="-120"/>
+              </a:rPr>
+              <a:t>Daily check-in: one-sentence response to </a:t>
             </a:r>
             <a:pPr algn="l" indent="0" marL="0">
               <a:lnSpc>
@@ -3669,40 +4614,18 @@
               <a:buNone/>
             </a:pPr>
             <a:r>
-              <a:rPr lang="en-US" sz="1200" dirty="0">
-                <a:solidFill>
-                  <a:srgbClr val="1A1A1A"/>
-                </a:solidFill>
-                <a:latin typeface="Georgia" pitchFamily="34" charset="0"/>
-                <a:ea typeface="Georgia" pitchFamily="34" charset="-122"/>
-                <a:cs typeface="Georgia" pitchFamily="34" charset="-120"/>
-              </a:rPr>
-              <a:t> Earth, water, fire, air, space — the five elements seen as both physical and pervasive.</a:t>
+              <a:rPr lang="en-US" sz="1200" i="1" dirty="0">
+                <a:solidFill>
+                  <a:srgbClr val="1A1A1A"/>
+                </a:solidFill>
+                <a:latin typeface="Georgia" pitchFamily="34" charset="0"/>
+                <a:ea typeface="Georgia" pitchFamily="34" charset="-122"/>
+                <a:cs typeface="Georgia" pitchFamily="34" charset="-120"/>
+              </a:rPr>
+              <a:t>"What's one thing you remember about yesterday's lesson?"</a:t>
             </a:r>
             <a:endParaRPr lang="en-US" sz="1200" dirty="0"/>
           </a:p>
-        </p:txBody>
-      </p:sp>
-      <p:sp>
-        <p:nvSpPr>
-          <p:cNvPr id="5" name="Text 3"/>
-          <p:cNvSpPr/>
-          <p:nvPr/>
-        </p:nvSpPr>
-        <p:spPr>
-          <a:xfrm>
-            <a:off x="634901" y="1266974"/>
-            <a:ext cx="8102798" cy="693241"/>
-          </a:xfrm>
-          <a:prstGeom prst="rect">
-            <a:avLst/>
-          </a:prstGeom>
-          <a:noFill/>
-          <a:ln/>
-        </p:spPr>
-        <p:txBody>
-          <a:bodyPr wrap="square" lIns="0" tIns="0" rIns="0" bIns="0" rtlCol="0" anchor="t"/>
-          <a:lstStyle/>
           <a:p>
             <a:pPr algn="l" marL="342900" indent="-342900">
               <a:lnSpc>
@@ -3715,26 +4638,6 @@
               <a:buChar char="•"/>
             </a:pPr>
             <a:r>
-              <a:rPr lang="en-US" sz="1200" b="1" dirty="0">
-                <a:solidFill>
-                  <a:srgbClr val="1A1A1A"/>
-                </a:solidFill>
-                <a:latin typeface="Georgia" pitchFamily="34" charset="0"/>
-                <a:ea typeface="Georgia" pitchFamily="34" charset="-122"/>
-                <a:cs typeface="Georgia" pitchFamily="34" charset="-120"/>
-              </a:rPr>
-              <a:t>The interconnection principle.</a:t>
-            </a:r>
-            <a:pPr algn="l" indent="0" marL="0">
-              <a:lnSpc>
-                <a:spcPts val="1620"/>
-              </a:lnSpc>
-              <a:spcAft>
-                <a:spcPts val="300"/>
-              </a:spcAft>
-              <a:buNone/>
-            </a:pPr>
-            <a:r>
               <a:rPr lang="en-US" sz="1200" dirty="0">
                 <a:solidFill>
                   <a:srgbClr val="1A1A1A"/>
@@ -3743,7 +4646,7 @@
                 <a:ea typeface="Georgia" pitchFamily="34" charset="-122"/>
                 <a:cs typeface="Georgia" pitchFamily="34" charset="-120"/>
               </a:rPr>
-              <a:t> No element exists alone. Earth needs water to support life. Water needs space to flow. Air needs warmth (fire) to circulate. Space contains all. This is the COSMOLOGICAL grounding for ecological ethics.</a:t>
+              <a:t>Hook: introduce a phenomenon or question that motivates today's concept.</a:t>
             </a:r>
             <a:endParaRPr lang="en-US" sz="1200" dirty="0"/>
           </a:p>
@@ -3751,345 +4654,7 @@
       </p:sp>
       <p:sp>
         <p:nvSpPr>
-          <p:cNvPr id="6" name="Text 4"/>
-          <p:cNvSpPr/>
-          <p:nvPr/>
-        </p:nvSpPr>
-        <p:spPr>
-          <a:xfrm>
-            <a:off x="634901" y="2061716"/>
-            <a:ext cx="8102798" cy="693241"/>
-          </a:xfrm>
-          <a:prstGeom prst="rect">
-            <a:avLst/>
-          </a:prstGeom>
-          <a:noFill/>
-          <a:ln/>
-        </p:spPr>
-        <p:txBody>
-          <a:bodyPr wrap="square" lIns="0" tIns="0" rIns="0" bIns="0" rtlCol="0" anchor="t"/>
-          <a:lstStyle/>
-          <a:p>
-            <a:pPr algn="l" marL="342900" indent="-342900">
-              <a:lnSpc>
-                <a:spcPts val="1620"/>
-              </a:lnSpc>
-              <a:spcAft>
-                <a:spcPts val="300"/>
-              </a:spcAft>
-              <a:buSzPct val="100000"/>
-              <a:buChar char="•"/>
-            </a:pPr>
-            <a:r>
-              <a:rPr lang="en-US" sz="1200" b="1" dirty="0">
-                <a:solidFill>
-                  <a:srgbClr val="1A1A1A"/>
-                </a:solidFill>
-                <a:latin typeface="Georgia" pitchFamily="34" charset="0"/>
-                <a:ea typeface="Georgia" pitchFamily="34" charset="-122"/>
-                <a:cs typeface="Georgia" pitchFamily="34" charset="-120"/>
-              </a:rPr>
-              <a:t>Modern translation.</a:t>
-            </a:r>
-            <a:pPr algn="l" indent="0" marL="0">
-              <a:lnSpc>
-                <a:spcPts val="1620"/>
-              </a:lnSpc>
-              <a:spcAft>
-                <a:spcPts val="300"/>
-              </a:spcAft>
-              <a:buNone/>
-            </a:pPr>
-            <a:r>
-              <a:rPr lang="en-US" sz="1200" dirty="0">
-                <a:solidFill>
-                  <a:srgbClr val="1A1A1A"/>
-                </a:solidFill>
-                <a:latin typeface="Georgia" pitchFamily="34" charset="0"/>
-                <a:ea typeface="Georgia" pitchFamily="34" charset="-122"/>
-                <a:cs typeface="Georgia" pitchFamily="34" charset="-120"/>
-              </a:rPr>
-              <a:t> Ecosystems = elemental cycles (carbon, nitrogen, water cycles). The pañcabhūta framework essentially names: matter (earth), water cycle (ap), energy (tejas), atmosphere (vāyu), and the systemic interconnection (ākāśa).</a:t>
-            </a:r>
-            <a:endParaRPr lang="en-US" sz="1200" dirty="0"/>
-          </a:p>
-        </p:txBody>
-      </p:sp>
-      <p:sp>
-        <p:nvSpPr>
-          <p:cNvPr id="7" name="Text 5"/>
-          <p:cNvSpPr/>
-          <p:nvPr/>
-        </p:nvSpPr>
-        <p:spPr>
-          <a:xfrm>
-            <a:off x="634901" y="2856458"/>
-            <a:ext cx="8102798" cy="487561"/>
-          </a:xfrm>
-          <a:prstGeom prst="rect">
-            <a:avLst/>
-          </a:prstGeom>
-          <a:noFill/>
-          <a:ln/>
-        </p:spPr>
-        <p:txBody>
-          <a:bodyPr wrap="square" lIns="0" tIns="0" rIns="0" bIns="0" rtlCol="0" anchor="t"/>
-          <a:lstStyle/>
-          <a:p>
-            <a:pPr algn="l" marL="342900" indent="-342900">
-              <a:lnSpc>
-                <a:spcPts val="1620"/>
-              </a:lnSpc>
-              <a:spcAft>
-                <a:spcPts val="300"/>
-              </a:spcAft>
-              <a:buSzPct val="100000"/>
-              <a:buChar char="•"/>
-            </a:pPr>
-            <a:r>
-              <a:rPr lang="en-US" sz="1200" b="1" dirty="0">
-                <a:solidFill>
-                  <a:srgbClr val="1A1A1A"/>
-                </a:solidFill>
-                <a:latin typeface="Georgia" pitchFamily="34" charset="0"/>
-                <a:ea typeface="Georgia" pitchFamily="34" charset="-122"/>
-                <a:cs typeface="Georgia" pitchFamily="34" charset="-120"/>
-              </a:rPr>
-              <a:t>Source.</a:t>
-            </a:r>
-            <a:pPr algn="l" indent="0" marL="0">
-              <a:lnSpc>
-                <a:spcPts val="1620"/>
-              </a:lnSpc>
-              <a:spcAft>
-                <a:spcPts val="300"/>
-              </a:spcAft>
-              <a:buNone/>
-            </a:pPr>
-            <a:r>
-              <a:rPr lang="en-US" sz="1200" dirty="0">
-                <a:solidFill>
-                  <a:srgbClr val="1A1A1A"/>
-                </a:solidFill>
-                <a:latin typeface="Georgia" pitchFamily="34" charset="0"/>
-                <a:ea typeface="Georgia" pitchFamily="34" charset="-122"/>
-                <a:cs typeface="Georgia" pitchFamily="34" charset="-120"/>
-              </a:rPr>
-              <a:t> Bhagavad Gītā 13.5 lists </a:t>
-            </a:r>
-            <a:pPr algn="l" indent="0" marL="0">
-              <a:lnSpc>
-                <a:spcPts val="1620"/>
-              </a:lnSpc>
-              <a:spcAft>
-                <a:spcPts val="300"/>
-              </a:spcAft>
-              <a:buNone/>
-            </a:pPr>
-            <a:r>
-              <a:rPr lang="en-US" sz="1200" i="1" dirty="0">
-                <a:solidFill>
-                  <a:srgbClr val="1A1A1A"/>
-                </a:solidFill>
-                <a:latin typeface="Georgia" pitchFamily="34" charset="0"/>
-                <a:ea typeface="Georgia" pitchFamily="34" charset="-122"/>
-                <a:cs typeface="Georgia" pitchFamily="34" charset="-120"/>
-              </a:rPr>
-              <a:t>mahā-bhūtāni</a:t>
-            </a:r>
-            <a:pPr algn="l" indent="0" marL="0">
-              <a:lnSpc>
-                <a:spcPts val="1620"/>
-              </a:lnSpc>
-              <a:spcAft>
-                <a:spcPts val="300"/>
-              </a:spcAft>
-              <a:buNone/>
-            </a:pPr>
-            <a:r>
-              <a:rPr lang="en-US" sz="1200" dirty="0">
-                <a:solidFill>
-                  <a:srgbClr val="1A1A1A"/>
-                </a:solidFill>
-                <a:latin typeface="Georgia" pitchFamily="34" charset="0"/>
-                <a:ea typeface="Georgia" pitchFamily="34" charset="-122"/>
-                <a:cs typeface="Georgia" pitchFamily="34" charset="-120"/>
-              </a:rPr>
-              <a:t> — the gross elements — as one of the </a:t>
-            </a:r>
-            <a:pPr algn="l" indent="0" marL="0">
-              <a:lnSpc>
-                <a:spcPts val="1620"/>
-              </a:lnSpc>
-              <a:spcAft>
-                <a:spcPts val="300"/>
-              </a:spcAft>
-              <a:buNone/>
-            </a:pPr>
-            <a:r>
-              <a:rPr lang="en-US" sz="1200" i="1" dirty="0">
-                <a:solidFill>
-                  <a:srgbClr val="1A1A1A"/>
-                </a:solidFill>
-                <a:latin typeface="Georgia" pitchFamily="34" charset="0"/>
-                <a:ea typeface="Georgia" pitchFamily="34" charset="-122"/>
-                <a:cs typeface="Georgia" pitchFamily="34" charset="-120"/>
-              </a:rPr>
-              <a:t>kṣetra</a:t>
-            </a:r>
-            <a:pPr algn="l" indent="0" marL="0">
-              <a:lnSpc>
-                <a:spcPts val="1620"/>
-              </a:lnSpc>
-              <a:spcAft>
-                <a:spcPts val="300"/>
-              </a:spcAft>
-              <a:buNone/>
-            </a:pPr>
-            <a:r>
-              <a:rPr lang="en-US" sz="1200" dirty="0">
-                <a:solidFill>
-                  <a:srgbClr val="1A1A1A"/>
-                </a:solidFill>
-                <a:latin typeface="Georgia" pitchFamily="34" charset="0"/>
-                <a:ea typeface="Georgia" pitchFamily="34" charset="-122"/>
-                <a:cs typeface="Georgia" pitchFamily="34" charset="-120"/>
-              </a:rPr>
-              <a:t> (field) categories. The conceptual frame is in place by ~2nd century BCE.</a:t>
-            </a:r>
-            <a:endParaRPr lang="en-US" sz="1200" dirty="0"/>
-          </a:p>
-        </p:txBody>
-      </p:sp>
-      <p:sp>
-        <p:nvSpPr>
-          <p:cNvPr id="8" name="Text 6"/>
-          <p:cNvSpPr/>
-          <p:nvPr/>
-        </p:nvSpPr>
-        <p:spPr>
-          <a:xfrm>
-            <a:off x="634901" y="3445520"/>
-            <a:ext cx="8102798" cy="487561"/>
-          </a:xfrm>
-          <a:prstGeom prst="rect">
-            <a:avLst/>
-          </a:prstGeom>
-          <a:noFill/>
-          <a:ln/>
-        </p:spPr>
-        <p:txBody>
-          <a:bodyPr wrap="square" lIns="0" tIns="0" rIns="0" bIns="0" rtlCol="0" anchor="t"/>
-          <a:lstStyle/>
-          <a:p>
-            <a:pPr algn="l" marL="342900" indent="-342900">
-              <a:lnSpc>
-                <a:spcPts val="1620"/>
-              </a:lnSpc>
-              <a:spcAft>
-                <a:spcPts val="300"/>
-              </a:spcAft>
-              <a:buSzPct val="100000"/>
-              <a:buChar char="•"/>
-            </a:pPr>
-            <a:r>
-              <a:rPr lang="en-US" sz="1200" b="1" dirty="0">
-                <a:solidFill>
-                  <a:srgbClr val="1A1A1A"/>
-                </a:solidFill>
-                <a:latin typeface="Georgia" pitchFamily="34" charset="0"/>
-                <a:ea typeface="Georgia" pitchFamily="34" charset="-122"/>
-                <a:cs typeface="Georgia" pitchFamily="34" charset="-120"/>
-              </a:rPr>
-              <a:t>Discussion.</a:t>
-            </a:r>
-            <a:pPr algn="l" indent="0" marL="0">
-              <a:lnSpc>
-                <a:spcPts val="1620"/>
-              </a:lnSpc>
-              <a:spcAft>
-                <a:spcPts val="300"/>
-              </a:spcAft>
-              <a:buNone/>
-            </a:pPr>
-            <a:r>
-              <a:rPr lang="en-US" sz="1200" dirty="0">
-                <a:solidFill>
-                  <a:srgbClr val="1A1A1A"/>
-                </a:solidFill>
-                <a:latin typeface="Georgia" pitchFamily="34" charset="0"/>
-                <a:ea typeface="Georgia" pitchFamily="34" charset="-122"/>
-                <a:cs typeface="Georgia" pitchFamily="34" charset="-120"/>
-              </a:rPr>
-              <a:t> </a:t>
-            </a:r>
-            <a:pPr algn="l" indent="0" marL="0">
-              <a:lnSpc>
-                <a:spcPts val="1620"/>
-              </a:lnSpc>
-              <a:spcAft>
-                <a:spcPts val="300"/>
-              </a:spcAft>
-              <a:buNone/>
-            </a:pPr>
-            <a:r>
-              <a:rPr lang="en-US" sz="1200" i="1" dirty="0">
-                <a:solidFill>
-                  <a:srgbClr val="1A1A1A"/>
-                </a:solidFill>
-                <a:latin typeface="Georgia" pitchFamily="34" charset="0"/>
-                <a:ea typeface="Georgia" pitchFamily="34" charset="-122"/>
-                <a:cs typeface="Georgia" pitchFamily="34" charset="-120"/>
-              </a:rPr>
-              <a:t>"If we damage one element — pollute air, contaminate water, deforest land — what happens to the others?"</a:t>
-            </a:r>
-            <a:pPr algn="l" indent="0" marL="0">
-              <a:lnSpc>
-                <a:spcPts val="1620"/>
-              </a:lnSpc>
-              <a:spcAft>
-                <a:spcPts val="300"/>
-              </a:spcAft>
-              <a:buNone/>
-            </a:pPr>
-            <a:r>
-              <a:rPr lang="en-US" sz="1200" dirty="0">
-                <a:solidFill>
-                  <a:srgbClr val="1A1A1A"/>
-                </a:solidFill>
-                <a:latin typeface="Georgia" pitchFamily="34" charset="0"/>
-                <a:ea typeface="Georgia" pitchFamily="34" charset="-122"/>
-                <a:cs typeface="Georgia" pitchFamily="34" charset="-120"/>
-              </a:rPr>
-              <a:t> Modern climate science answers concretely. </a:t>
-            </a:r>
-            <a:pPr algn="l" indent="0" marL="0">
-              <a:lnSpc>
-                <a:spcPts val="1620"/>
-              </a:lnSpc>
-              <a:spcAft>
-                <a:spcPts val="300"/>
-              </a:spcAft>
-              <a:buNone/>
-            </a:pPr>
-            <a:r>
-              <a:rPr lang="en-US" sz="1200" i="1" dirty="0">
-                <a:solidFill>
-                  <a:srgbClr val="1A1A1A"/>
-                </a:solidFill>
-                <a:latin typeface="Georgia" pitchFamily="34" charset="0"/>
-                <a:ea typeface="Georgia" pitchFamily="34" charset="-122"/>
-                <a:cs typeface="Georgia" pitchFamily="34" charset="-120"/>
-              </a:rPr>
-              <a:t>"Indic ecology says these aren't separate problems."</a:t>
-            </a:r>
-            <a:endParaRPr lang="en-US" sz="1200" dirty="0"/>
-          </a:p>
-        </p:txBody>
-      </p:sp>
-      <p:sp>
-        <p:nvSpPr>
-          <p:cNvPr id="9" name="Text 7"/>
+          <p:cNvPr id="5" name="Text 3"/>
           <p:cNvSpPr/>
           <p:nvPr/>
         </p:nvSpPr>
@@ -4239,7 +4804,7 @@
                 <a:ea typeface="Times New Roman" pitchFamily="34" charset="-122"/>
                 <a:cs typeface="Times New Roman" pitchFamily="34" charset="-120"/>
               </a:rPr>
-              <a:t>Activity (15 min)</a:t>
+              <a:t>Core (20 min)</a:t>
             </a:r>
             <a:endParaRPr lang="en-US" sz="1800" dirty="0"/>
           </a:p>
@@ -4253,8 +4818,8 @@
         </p:nvSpPr>
         <p:spPr>
           <a:xfrm>
-            <a:off x="406301" y="870942"/>
-            <a:ext cx="8498026" cy="436066"/>
+            <a:off x="634901" y="883593"/>
+            <a:ext cx="8102798" cy="281880"/>
           </a:xfrm>
           <a:prstGeom prst="rect">
             <a:avLst/>
@@ -4266,13 +4831,31 @@
           <a:bodyPr wrap="square" lIns="0" tIns="0" rIns="0" bIns="0" rtlCol="0" anchor="t"/>
           <a:lstStyle/>
           <a:p>
+            <a:pPr algn="l" marL="342900" indent="-342900">
+              <a:lnSpc>
+                <a:spcPts val="1620"/>
+              </a:lnSpc>
+              <a:spcAft>
+                <a:spcPts val="300"/>
+              </a:spcAft>
+              <a:buSzPct val="100000"/>
+              <a:buChar char="•"/>
+            </a:pPr>
+            <a:r>
+              <a:rPr lang="en-US" sz="1200" b="1" dirty="0">
+                <a:solidFill>
+                  <a:srgbClr val="1A1A1A"/>
+                </a:solidFill>
+                <a:latin typeface="Georgia" pitchFamily="34" charset="0"/>
+                <a:ea typeface="Georgia" pitchFamily="34" charset="-122"/>
+                <a:cs typeface="Georgia" pitchFamily="34" charset="-120"/>
+              </a:rPr>
+              <a:t>Recall Module 2's pañcabhūta.</a:t>
+            </a:r>
             <a:pPr algn="l" indent="0" marL="0">
               <a:lnSpc>
-                <a:spcPts val="1680"/>
-              </a:lnSpc>
-              <a:spcBef>
-                <a:spcPts val="300"/>
-              </a:spcBef>
+                <a:spcPts val="1620"/>
+              </a:lnSpc>
               <a:spcAft>
                 <a:spcPts val="300"/>
               </a:spcAft>
@@ -4287,38 +4870,58 @@
                 <a:ea typeface="Georgia" pitchFamily="34" charset="-122"/>
                 <a:cs typeface="Georgia" pitchFamily="34" charset="-120"/>
               </a:rPr>
-              <a:t>A scaled version of </a:t>
+              <a:t> Earth, water, fire, air, space — the five elements seen as both physical and pervasive.</a:t>
+            </a:r>
+            <a:endParaRPr lang="en-US" sz="1200" dirty="0"/>
+          </a:p>
+        </p:txBody>
+      </p:sp>
+      <p:sp>
+        <p:nvSpPr>
+          <p:cNvPr id="5" name="Text 3"/>
+          <p:cNvSpPr/>
+          <p:nvPr/>
+        </p:nvSpPr>
+        <p:spPr>
+          <a:xfrm>
+            <a:off x="634901" y="1266974"/>
+            <a:ext cx="8102798" cy="693241"/>
+          </a:xfrm>
+          <a:prstGeom prst="rect">
+            <a:avLst/>
+          </a:prstGeom>
+          <a:noFill/>
+          <a:ln/>
+        </p:spPr>
+        <p:txBody>
+          <a:bodyPr wrap="square" lIns="0" tIns="0" rIns="0" bIns="0" rtlCol="0" anchor="t"/>
+          <a:lstStyle/>
+          <a:p>
+            <a:pPr algn="l" marL="342900" indent="-342900">
+              <a:lnSpc>
+                <a:spcPts val="1620"/>
+              </a:lnSpc>
+              <a:spcAft>
+                <a:spcPts val="300"/>
+              </a:spcAft>
+              <a:buSzPct val="100000"/>
+              <a:buChar char="•"/>
+            </a:pPr>
+            <a:r>
+              <a:rPr lang="en-US" sz="1200" b="1" dirty="0">
+                <a:solidFill>
+                  <a:srgbClr val="1A1A1A"/>
+                </a:solidFill>
+                <a:latin typeface="Georgia" pitchFamily="34" charset="0"/>
+                <a:ea typeface="Georgia" pitchFamily="34" charset="-122"/>
+                <a:cs typeface="Georgia" pitchFamily="34" charset="-120"/>
+              </a:rPr>
+              <a:t>The interconnection principle.</a:t>
             </a:r>
             <a:pPr algn="l" indent="0" marL="0">
               <a:lnSpc>
-                <a:spcPts val="1680"/>
-              </a:lnSpc>
-              <a:spcBef>
-                <a:spcPts val="300"/>
-              </a:spcBef>
-              <a:spcAft>
-                <a:spcPts val="300"/>
-              </a:spcAft>
-              <a:buNone/>
-            </a:pPr>
-            <a:r>
-              <a:rPr lang="en-US" sz="1200" i="1" dirty="0">
-                <a:solidFill>
-                  <a:srgbClr val="1A1A1A"/>
-                </a:solidFill>
-                <a:latin typeface="Georgia" pitchFamily="34" charset="0"/>
-                <a:ea typeface="Georgia" pitchFamily="34" charset="-122"/>
-                <a:cs typeface="Georgia" pitchFamily="34" charset="-120"/>
-              </a:rPr>
-              <a:t>Sacred Grove (or Local Ecology) Mapping</a:t>
-            </a:r>
-            <a:pPr algn="l" indent="0" marL="0">
-              <a:lnSpc>
-                <a:spcPts val="1680"/>
-              </a:lnSpc>
-              <a:spcBef>
-                <a:spcPts val="300"/>
-              </a:spcBef>
+                <a:spcPts val="1620"/>
+              </a:lnSpc>
               <a:spcAft>
                 <a:spcPts val="300"/>
               </a:spcAft>
@@ -4333,53 +4936,7 @@
                 <a:ea typeface="Georgia" pitchFamily="34" charset="-122"/>
                 <a:cs typeface="Georgia" pitchFamily="34" charset="-120"/>
               </a:rPr>
-              <a:t> (see </a:t>
-            </a:r>
-            <a:pPr algn="l" indent="0" marL="0">
-              <a:lnSpc>
-                <a:spcPts val="1680"/>
-              </a:lnSpc>
-              <a:spcBef>
-                <a:spcPts val="300"/>
-              </a:spcBef>
-              <a:spcAft>
-                <a:spcPts val="300"/>
-              </a:spcAft>
-              <a:buNone/>
-            </a:pPr>
-            <a:r>
-              <a:rPr lang="en-US" sz="1200" dirty="0">
-                <a:solidFill>
-                  <a:srgbClr val="1A1A1A"/>
-                </a:solidFill>
-                <a:latin typeface="Georgia" pitchFamily="34" charset="0"/>
-                <a:ea typeface="Georgia" pitchFamily="34" charset="-122"/>
-                <a:cs typeface="Georgia" pitchFamily="34" charset="-120"/>
-              </a:rPr>
-              <a:t>activities/</a:t>
-            </a:r>
-            <a:pPr algn="l" indent="0" marL="0">
-              <a:lnSpc>
-                <a:spcPts val="1680"/>
-              </a:lnSpc>
-              <a:spcBef>
-                <a:spcPts val="300"/>
-              </a:spcBef>
-              <a:spcAft>
-                <a:spcPts val="300"/>
-              </a:spcAft>
-              <a:buNone/>
-            </a:pPr>
-            <a:r>
-              <a:rPr lang="en-US" sz="1200" dirty="0">
-                <a:solidFill>
-                  <a:srgbClr val="1A1A1A"/>
-                </a:solidFill>
-                <a:latin typeface="Georgia" pitchFamily="34" charset="0"/>
-                <a:ea typeface="Georgia" pitchFamily="34" charset="-122"/>
-                <a:cs typeface="Georgia" pitchFamily="34" charset="-120"/>
-              </a:rPr>
-              <a:t>). Today's slice: focus on the part of the activity that reinforces Five Elements as Ecological Frame.</a:t>
+              <a:t> No element exists alone. Earth needs water to support life. Water needs space to flow. Air needs warmth (fire) to circulate. Space contains all. This is the COSMOLOGICAL grounding for ecological ethics.</a:t>
             </a:r>
             <a:endParaRPr lang="en-US" sz="1200" dirty="0"/>
           </a:p>
@@ -4387,7 +4944,7 @@
       </p:sp>
       <p:sp>
         <p:nvSpPr>
-          <p:cNvPr id="5" name="Text 3"/>
+          <p:cNvPr id="6" name="Text 4"/>
           <p:cNvSpPr/>
           <p:nvPr/>
         </p:nvSpPr>
@@ -4537,7 +5094,7 @@
                 <a:ea typeface="Times New Roman" pitchFamily="34" charset="-122"/>
                 <a:cs typeface="Times New Roman" pitchFamily="34" charset="-120"/>
               </a:rPr>
-              <a:t>Wrap-up (5 min)</a:t>
+              <a:t>Core (20 min) (cont.)</a:t>
             </a:r>
             <a:endParaRPr lang="en-US" sz="1800" dirty="0"/>
           </a:p>
@@ -4551,8 +5108,8 @@
         </p:nvSpPr>
         <p:spPr>
           <a:xfrm>
-            <a:off x="406301" y="870942"/>
-            <a:ext cx="8498026" cy="213271"/>
+            <a:off x="634901" y="883593"/>
+            <a:ext cx="8102798" cy="693241"/>
           </a:xfrm>
           <a:prstGeom prst="rect">
             <a:avLst/>
@@ -4564,13 +5121,31 @@
           <a:bodyPr wrap="square" lIns="0" tIns="0" rIns="0" bIns="0" rtlCol="0" anchor="t"/>
           <a:lstStyle/>
           <a:p>
+            <a:pPr algn="l" marL="342900" indent="-342900">
+              <a:lnSpc>
+                <a:spcPts val="1620"/>
+              </a:lnSpc>
+              <a:spcAft>
+                <a:spcPts val="300"/>
+              </a:spcAft>
+              <a:buSzPct val="100000"/>
+              <a:buChar char="•"/>
+            </a:pPr>
+            <a:r>
+              <a:rPr lang="en-US" sz="1200" b="1" dirty="0">
+                <a:solidFill>
+                  <a:srgbClr val="1A1A1A"/>
+                </a:solidFill>
+                <a:latin typeface="Georgia" pitchFamily="34" charset="0"/>
+                <a:ea typeface="Georgia" pitchFamily="34" charset="-122"/>
+                <a:cs typeface="Georgia" pitchFamily="34" charset="-120"/>
+              </a:rPr>
+              <a:t>Modern translation.</a:t>
+            </a:r>
             <a:pPr algn="l" indent="0" marL="0">
               <a:lnSpc>
-                <a:spcPts val="1680"/>
-              </a:lnSpc>
-              <a:spcBef>
-                <a:spcPts val="300"/>
-              </a:spcBef>
+                <a:spcPts val="1620"/>
+              </a:lnSpc>
               <a:spcAft>
                 <a:spcPts val="300"/>
               </a:spcAft>
@@ -4585,15 +5160,78 @@
                 <a:ea typeface="Georgia" pitchFamily="34" charset="-122"/>
                 <a:cs typeface="Georgia" pitchFamily="34" charset="-120"/>
               </a:rPr>
-              <a:t>– One-sentence exit ticket: </a:t>
+              <a:t> Ecosystems = elemental cycles (carbon, nitrogen, water cycles). The pañcabhūta framework essentially names: matter (earth), water cycle (ap), energy (tejas), atmosphere (vāyu), and the systemic interconnection (ākāśa).</a:t>
+            </a:r>
+            <a:endParaRPr lang="en-US" sz="1200" dirty="0"/>
+          </a:p>
+        </p:txBody>
+      </p:sp>
+      <p:sp>
+        <p:nvSpPr>
+          <p:cNvPr id="5" name="Text 3"/>
+          <p:cNvSpPr/>
+          <p:nvPr/>
+        </p:nvSpPr>
+        <p:spPr>
+          <a:xfrm>
+            <a:off x="634901" y="1678335"/>
+            <a:ext cx="8102798" cy="487561"/>
+          </a:xfrm>
+          <a:prstGeom prst="rect">
+            <a:avLst/>
+          </a:prstGeom>
+          <a:noFill/>
+          <a:ln/>
+        </p:spPr>
+        <p:txBody>
+          <a:bodyPr wrap="square" lIns="0" tIns="0" rIns="0" bIns="0" rtlCol="0" anchor="t"/>
+          <a:lstStyle/>
+          <a:p>
+            <a:pPr algn="l" marL="342900" indent="-342900">
+              <a:lnSpc>
+                <a:spcPts val="1620"/>
+              </a:lnSpc>
+              <a:spcAft>
+                <a:spcPts val="300"/>
+              </a:spcAft>
+              <a:buSzPct val="100000"/>
+              <a:buChar char="•"/>
+            </a:pPr>
+            <a:r>
+              <a:rPr lang="en-US" sz="1200" b="1" dirty="0">
+                <a:solidFill>
+                  <a:srgbClr val="1A1A1A"/>
+                </a:solidFill>
+                <a:latin typeface="Georgia" pitchFamily="34" charset="0"/>
+                <a:ea typeface="Georgia" pitchFamily="34" charset="-122"/>
+                <a:cs typeface="Georgia" pitchFamily="34" charset="-120"/>
+              </a:rPr>
+              <a:t>Source.</a:t>
             </a:r>
             <a:pPr algn="l" indent="0" marL="0">
               <a:lnSpc>
-                <a:spcPts val="1680"/>
-              </a:lnSpc>
-              <a:spcBef>
-                <a:spcPts val="300"/>
-              </a:spcBef>
+                <a:spcPts val="1620"/>
+              </a:lnSpc>
+              <a:spcAft>
+                <a:spcPts val="300"/>
+              </a:spcAft>
+              <a:buNone/>
+            </a:pPr>
+            <a:r>
+              <a:rPr lang="en-US" sz="1200" dirty="0">
+                <a:solidFill>
+                  <a:srgbClr val="1A1A1A"/>
+                </a:solidFill>
+                <a:latin typeface="Georgia" pitchFamily="34" charset="0"/>
+                <a:ea typeface="Georgia" pitchFamily="34" charset="-122"/>
+                <a:cs typeface="Georgia" pitchFamily="34" charset="-120"/>
+              </a:rPr>
+              <a:t> Bhagavad Gītā 13.5 lists </a:t>
+            </a:r>
+            <a:pPr algn="l" indent="0" marL="0">
+              <a:lnSpc>
+                <a:spcPts val="1620"/>
+              </a:lnSpc>
               <a:spcAft>
                 <a:spcPts val="300"/>
               </a:spcAft>
@@ -4608,15 +5246,12 @@
                 <a:ea typeface="Georgia" pitchFamily="34" charset="-122"/>
                 <a:cs typeface="Georgia" pitchFamily="34" charset="-120"/>
               </a:rPr>
-              <a:t>"What's one thing you learned today?"</a:t>
+              <a:t>mahā-bhūtāni</a:t>
             </a:r>
             <a:pPr algn="l" indent="0" marL="0">
               <a:lnSpc>
-                <a:spcPts val="1680"/>
-              </a:lnSpc>
-              <a:spcBef>
-                <a:spcPts val="300"/>
-              </a:spcBef>
+                <a:spcPts val="1620"/>
+              </a:lnSpc>
               <a:spcAft>
                 <a:spcPts val="300"/>
               </a:spcAft>
@@ -4631,7 +5266,47 @@
                 <a:ea typeface="Georgia" pitchFamily="34" charset="-122"/>
                 <a:cs typeface="Georgia" pitchFamily="34" charset="-120"/>
               </a:rPr>
-              <a:t> – Preview tomorrow.</a:t>
+              <a:t> — the gross elements — as one of the </a:t>
+            </a:r>
+            <a:pPr algn="l" indent="0" marL="0">
+              <a:lnSpc>
+                <a:spcPts val="1620"/>
+              </a:lnSpc>
+              <a:spcAft>
+                <a:spcPts val="300"/>
+              </a:spcAft>
+              <a:buNone/>
+            </a:pPr>
+            <a:r>
+              <a:rPr lang="en-US" sz="1200" i="1" dirty="0">
+                <a:solidFill>
+                  <a:srgbClr val="1A1A1A"/>
+                </a:solidFill>
+                <a:latin typeface="Georgia" pitchFamily="34" charset="0"/>
+                <a:ea typeface="Georgia" pitchFamily="34" charset="-122"/>
+                <a:cs typeface="Georgia" pitchFamily="34" charset="-120"/>
+              </a:rPr>
+              <a:t>kṣetra</a:t>
+            </a:r>
+            <a:pPr algn="l" indent="0" marL="0">
+              <a:lnSpc>
+                <a:spcPts val="1620"/>
+              </a:lnSpc>
+              <a:spcAft>
+                <a:spcPts val="300"/>
+              </a:spcAft>
+              <a:buNone/>
+            </a:pPr>
+            <a:r>
+              <a:rPr lang="en-US" sz="1200" dirty="0">
+                <a:solidFill>
+                  <a:srgbClr val="1A1A1A"/>
+                </a:solidFill>
+                <a:latin typeface="Georgia" pitchFamily="34" charset="0"/>
+                <a:ea typeface="Georgia" pitchFamily="34" charset="-122"/>
+                <a:cs typeface="Georgia" pitchFamily="34" charset="-120"/>
+              </a:rPr>
+              <a:t> (field) categories. The conceptual frame is in place by ~2nd century BCE.</a:t>
             </a:r>
             <a:endParaRPr lang="en-US" sz="1200" dirty="0"/>
           </a:p>
@@ -4639,7 +5314,7 @@
       </p:sp>
       <p:sp>
         <p:nvSpPr>
-          <p:cNvPr id="5" name="Text 3"/>
+          <p:cNvPr id="6" name="Text 4"/>
           <p:cNvSpPr/>
           <p:nvPr/>
         </p:nvSpPr>
@@ -4789,7 +5464,7 @@
                 <a:ea typeface="Times New Roman" pitchFamily="34" charset="-122"/>
                 <a:cs typeface="Times New Roman" pitchFamily="34" charset="-120"/>
               </a:rPr>
-              <a:t>Homework</a:t>
+              <a:t>Core (20 min) (cont.)</a:t>
             </a:r>
             <a:endParaRPr lang="en-US" sz="1800" dirty="0"/>
           </a:p>
@@ -4803,8 +5478,8 @@
         </p:nvSpPr>
         <p:spPr>
           <a:xfrm>
-            <a:off x="406301" y="870942"/>
-            <a:ext cx="8498026" cy="222796"/>
+            <a:off x="634901" y="883593"/>
+            <a:ext cx="8102798" cy="487561"/>
           </a:xfrm>
           <a:prstGeom prst="rect">
             <a:avLst/>
@@ -4816,13 +5491,31 @@
           <a:bodyPr wrap="square" lIns="0" tIns="0" rIns="0" bIns="0" rtlCol="0" anchor="t"/>
           <a:lstStyle/>
           <a:p>
+            <a:pPr algn="l" marL="342900" indent="-342900">
+              <a:lnSpc>
+                <a:spcPts val="1620"/>
+              </a:lnSpc>
+              <a:spcAft>
+                <a:spcPts val="300"/>
+              </a:spcAft>
+              <a:buSzPct val="100000"/>
+              <a:buChar char="•"/>
+            </a:pPr>
+            <a:r>
+              <a:rPr lang="en-US" sz="1200" b="1" dirty="0">
+                <a:solidFill>
+                  <a:srgbClr val="1A1A1A"/>
+                </a:solidFill>
+                <a:latin typeface="Georgia" pitchFamily="34" charset="0"/>
+                <a:ea typeface="Georgia" pitchFamily="34" charset="-122"/>
+                <a:cs typeface="Georgia" pitchFamily="34" charset="-120"/>
+              </a:rPr>
+              <a:t>Discussion.</a:t>
+            </a:r>
             <a:pPr algn="l" indent="0" marL="0">
               <a:lnSpc>
-                <a:spcPts val="1680"/>
-              </a:lnSpc>
-              <a:spcBef>
-                <a:spcPts val="300"/>
-              </a:spcBef>
+                <a:spcPts val="1620"/>
+              </a:lnSpc>
               <a:spcAft>
                 <a:spcPts val="300"/>
               </a:spcAft>
@@ -4837,15 +5530,32 @@
                 <a:ea typeface="Georgia" pitchFamily="34" charset="-122"/>
                 <a:cs typeface="Georgia" pitchFamily="34" charset="-120"/>
               </a:rPr>
-              <a:t>(See </a:t>
+              <a:t> </a:t>
             </a:r>
             <a:pPr algn="l" indent="0" marL="0">
               <a:lnSpc>
-                <a:spcPts val="1680"/>
-              </a:lnSpc>
-              <a:spcBef>
-                <a:spcPts val="300"/>
-              </a:spcBef>
+                <a:spcPts val="1620"/>
+              </a:lnSpc>
+              <a:spcAft>
+                <a:spcPts val="300"/>
+              </a:spcAft>
+              <a:buNone/>
+            </a:pPr>
+            <a:r>
+              <a:rPr lang="en-US" sz="1200" i="1" dirty="0">
+                <a:solidFill>
+                  <a:srgbClr val="1A1A1A"/>
+                </a:solidFill>
+                <a:latin typeface="Georgia" pitchFamily="34" charset="0"/>
+                <a:ea typeface="Georgia" pitchFamily="34" charset="-122"/>
+                <a:cs typeface="Georgia" pitchFamily="34" charset="-120"/>
+              </a:rPr>
+              <a:t>"If we damage one element — pollute air, contaminate water, deforest land — what happens to the others?"</a:t>
+            </a:r>
+            <a:pPr algn="l" indent="0" marL="0">
+              <a:lnSpc>
+                <a:spcPts val="1620"/>
+              </a:lnSpc>
               <a:spcAft>
                 <a:spcPts val="300"/>
               </a:spcAft>
@@ -4860,30 +5570,27 @@
                 <a:ea typeface="Georgia" pitchFamily="34" charset="-122"/>
                 <a:cs typeface="Georgia" pitchFamily="34" charset="-120"/>
               </a:rPr>
-              <a:t>homework.md</a:t>
+              <a:t> Modern climate science answers concretely. </a:t>
             </a:r>
             <a:pPr algn="l" indent="0" marL="0">
               <a:lnSpc>
-                <a:spcPts val="1680"/>
-              </a:lnSpc>
-              <a:spcBef>
-                <a:spcPts val="300"/>
-              </a:spcBef>
-              <a:spcAft>
-                <a:spcPts val="300"/>
-              </a:spcAft>
-              <a:buNone/>
-            </a:pPr>
-            <a:r>
-              <a:rPr lang="en-US" sz="1200" dirty="0">
-                <a:solidFill>
-                  <a:srgbClr val="1A1A1A"/>
-                </a:solidFill>
-                <a:latin typeface="Georgia" pitchFamily="34" charset="0"/>
-                <a:ea typeface="Georgia" pitchFamily="34" charset="-122"/>
-                <a:cs typeface="Georgia" pitchFamily="34" charset="-120"/>
-              </a:rPr>
-              <a:t> for today's task.)</a:t>
+                <a:spcPts val="1620"/>
+              </a:lnSpc>
+              <a:spcAft>
+                <a:spcPts val="300"/>
+              </a:spcAft>
+              <a:buNone/>
+            </a:pPr>
+            <a:r>
+              <a:rPr lang="en-US" sz="1200" i="1" dirty="0">
+                <a:solidFill>
+                  <a:srgbClr val="1A1A1A"/>
+                </a:solidFill>
+                <a:latin typeface="Georgia" pitchFamily="34" charset="0"/>
+                <a:ea typeface="Georgia" pitchFamily="34" charset="-122"/>
+                <a:cs typeface="Georgia" pitchFamily="34" charset="-120"/>
+              </a:rPr>
+              <a:t>"Indic ecology says these aren't separate problems."</a:t>
             </a:r>
             <a:endParaRPr lang="en-US" sz="1200" dirty="0"/>
           </a:p>
